--- a/QualityLens_기획서.pptx
+++ b/QualityLens_기획서.pptx
@@ -12143,194 +12143,249 @@
           <a:lstStyle/>
           <a:p>
             <a:pPr algn="l">
+              <a:spcBef>
+                <a:spcPts val="400"/>
+              </a:spcBef>
+              <a:spcAft>
+                <a:spcPts val="100"/>
+              </a:spcAft>
+              <a:defRPr sz="1400" b="1">
+                <a:solidFill>
+                  <a:srgbClr val="1A478A"/>
+                </a:solidFill>
+                <a:latin typeface="Malgun Gothic"/>
+              </a:defRPr>
+            </a:pPr>
+            <a:r>
+              <a:t>해결하고자 하는 제조 현장의 문제</a:t>
+            </a:r>
+          </a:p>
+          <a:p>
+            <a:pPr algn="l">
+              <a:spcBef>
+                <a:spcPts val="0"/>
+              </a:spcBef>
+              <a:spcAft>
+                <a:spcPts val="600"/>
+              </a:spcAft>
+              <a:defRPr sz="1000" b="0">
+                <a:solidFill>
+                  <a:srgbClr val="333333"/>
+                </a:solidFill>
+                <a:latin typeface="Malgun Gothic"/>
+              </a:defRPr>
+            </a:pPr>
+            <a:r>
+              <a:t>경기도 내 중소 전자부품 제조사들은 수백 개 공정 센서 데이터를 보유하면서도, 전문 분석 인력 부재로 최종 검사 이후에야 불량을 확인하는 '사후 대응'에 의존. 데이터 기반 예방적 품질 관리가 시급함.</a:t>
+            </a:r>
+          </a:p>
+          <a:p>
+            <a:pPr algn="l">
+              <a:spcBef>
+                <a:spcPts val="400"/>
+              </a:spcBef>
+              <a:spcAft>
+                <a:spcPts val="100"/>
+              </a:spcAft>
+              <a:defRPr sz="1400" b="1">
+                <a:solidFill>
+                  <a:srgbClr val="1A478A"/>
+                </a:solidFill>
+                <a:latin typeface="Malgun Gothic"/>
+              </a:defRPr>
+            </a:pPr>
+            <a:r>
+              <a:t>적용 대상</a:t>
+            </a:r>
+          </a:p>
+          <a:p>
+            <a:pPr algn="l">
+              <a:spcBef>
+                <a:spcPts val="0"/>
+              </a:spcBef>
               <a:spcAft>
                 <a:spcPts val="200"/>
               </a:spcAft>
+              <a:defRPr sz="1000" b="0">
+                <a:solidFill>
+                  <a:srgbClr val="333333"/>
+                </a:solidFill>
+                <a:latin typeface="Malgun Gothic"/>
+              </a:defRPr>
+            </a:pPr>
+            <a:r>
+              <a:t>경기도 스마트공장 보급 확산 사업 대상 중소 전자부품 제조사의 QC 부서 및 생산 현장</a:t>
+            </a:r>
+          </a:p>
+          <a:p>
+            <a:pPr algn="l">
+              <a:spcBef>
+                <a:spcPts val="0"/>
+              </a:spcBef>
+              <a:spcAft>
+                <a:spcPts val="600"/>
+              </a:spcAft>
+              <a:defRPr sz="1000" b="0">
+                <a:solidFill>
+                  <a:srgbClr val="333333"/>
+                </a:solidFill>
+                <a:latin typeface="Malgun Gothic"/>
+              </a:defRPr>
+            </a:pPr>
+            <a:r>
+              <a:t>→ 공정 중간 단계에서 불량 징후 사전 감지 + 현장 작업자 즉각 조치 지원</a:t>
+            </a:r>
+          </a:p>
+          <a:p>
+            <a:pPr algn="l">
+              <a:spcBef>
+                <a:spcPts val="400"/>
+              </a:spcBef>
+              <a:spcAft>
+                <a:spcPts val="100"/>
+              </a:spcAft>
               <a:defRPr sz="1400" b="1">
                 <a:solidFill>
-                  <a:srgbClr val="202124"/>
+                  <a:srgbClr val="1A478A"/>
                 </a:solidFill>
                 <a:latin typeface="Malgun Gothic"/>
               </a:defRPr>
             </a:pPr>
             <a:r>
-              <a:t>해결하고자 하는 제조 현장의 문제</a:t>
+              <a:t>문제의 중요성</a:t>
             </a:r>
           </a:p>
           <a:p>
             <a:pPr algn="l">
-              <a:spcAft>
-                <a:spcPts val="800"/>
+              <a:spcBef>
+                <a:spcPts val="0"/>
+              </a:spcBef>
+              <a:spcAft>
+                <a:spcPts val="200"/>
               </a:spcAft>
               <a:defRPr sz="1000" b="0">
                 <a:solidFill>
-                  <a:srgbClr val="202124"/>
+                  <a:srgbClr val="333333"/>
                 </a:solidFill>
                 <a:latin typeface="Malgun Gothic"/>
               </a:defRPr>
             </a:pPr>
             <a:r>
-              <a:t>경기도 내 중소 전자부품·반도체 부품 제조사들은 사출, 도금, 식각, 열처리 등 복합 공정에서 발생하는 품질 불량에 대해 최종 검사 이후에야 불량을 확인하는 사후 대응 방식에 의존하고 있습니다. 각 공정 단계에서 수집되는 수백 개의 센서 데이터가 존재하지만, 전문 데이터 분석 인력이 부족한 중소기업 특성상 이 데이터를 품질 관리에 활용하지 못하고 있습니다.</a:t>
+              <a:t>• 평균 불량률 3~8%, 불량 1건당 원자재·재작업 비용 수십만~수백만 원 직접 손실</a:t>
             </a:r>
           </a:p>
           <a:p>
             <a:pPr algn="l">
+              <a:spcBef>
+                <a:spcPts val="0"/>
+              </a:spcBef>
               <a:spcAft>
                 <a:spcPts val="200"/>
               </a:spcAft>
+              <a:defRPr sz="1000" b="0">
+                <a:solidFill>
+                  <a:srgbClr val="333333"/>
+                </a:solidFill>
+                <a:latin typeface="Malgun Gothic"/>
+              </a:defRPr>
+            </a:pPr>
+            <a:r>
+              <a:t>• 분석 인력 부재 → 원인 분석 평균 2~3일 소요 → 동일 원인 반복 불량</a:t>
+            </a:r>
+          </a:p>
+          <a:p>
+            <a:pPr algn="l">
+              <a:spcBef>
+                <a:spcPts val="0"/>
+              </a:spcBef>
+              <a:spcAft>
+                <a:spcPts val="600"/>
+              </a:spcAft>
+              <a:defRPr sz="1000" b="0">
+                <a:solidFill>
+                  <a:srgbClr val="333333"/>
+                </a:solidFill>
+                <a:latin typeface="Malgun Gothic"/>
+              </a:defRPr>
+            </a:pPr>
+            <a:r>
+              <a:t>• 공정 변수 간 복합 상호작용 → 경험만으로 근본 원인 파악 불가 → AI 필수 영역</a:t>
+            </a:r>
+          </a:p>
+          <a:p>
+            <a:pPr algn="l">
+              <a:spcBef>
+                <a:spcPts val="400"/>
+              </a:spcBef>
+              <a:spcAft>
+                <a:spcPts val="100"/>
+              </a:spcAft>
               <a:defRPr sz="1400" b="1">
                 <a:solidFill>
-                  <a:srgbClr val="202124"/>
+                  <a:srgbClr val="1A478A"/>
                 </a:solidFill>
                 <a:latin typeface="Malgun Gothic"/>
               </a:defRPr>
             </a:pPr>
             <a:r>
-              <a:t>적용 대상 및 영역</a:t>
+              <a:t>KPI / 기대 변화</a:t>
             </a:r>
           </a:p>
           <a:p>
             <a:pPr algn="l">
-              <a:spcAft>
-                <a:spcPts val="800"/>
+              <a:spcBef>
+                <a:spcPts val="0"/>
+              </a:spcBef>
+              <a:spcAft>
+                <a:spcPts val="200"/>
               </a:spcAft>
               <a:defRPr sz="1000" b="0">
                 <a:solidFill>
-                  <a:srgbClr val="202124"/>
+                  <a:srgbClr val="333333"/>
                 </a:solidFill>
                 <a:latin typeface="Malgun Gothic"/>
               </a:defRPr>
             </a:pPr>
             <a:r>
-              <a:t>경기도 스마트공장 보급 확산 사업 대상인 중소 전자부품 제조사의 품질관리(QC) 부서 및 생산 현장. 특히 공정 중간 단계에서 불량 징후를 사전 감지하고, 현장 작업자가 즉각적인 공정 조건 조정을 할 수 있도록 지원하는 '예방적 품질 관리 플랫폼'을 목표로 합니다.</a:t>
+              <a:t>• 불량 사전 감지율: 0%(사후 검사) → 70%+ (공정 중 사전 예측)</a:t>
             </a:r>
           </a:p>
           <a:p>
             <a:pPr algn="l">
+              <a:spcBef>
+                <a:spcPts val="0"/>
+              </a:spcBef>
               <a:spcAft>
                 <a:spcPts val="200"/>
               </a:spcAft>
-              <a:defRPr sz="1400" b="1">
-                <a:solidFill>
-                  <a:srgbClr val="202124"/>
+              <a:defRPr sz="1000" b="0">
+                <a:solidFill>
+                  <a:srgbClr val="333333"/>
                 </a:solidFill>
                 <a:latin typeface="Malgun Gothic"/>
               </a:defRPr>
             </a:pPr>
             <a:r>
-              <a:t>문제의 중요성</a:t>
+              <a:t>• 원인 분석 시간: 2~3일 → 실시간 (AI 자동 변수 기여도 제시)</a:t>
             </a:r>
           </a:p>
           <a:p>
             <a:pPr algn="l">
+              <a:spcBef>
+                <a:spcPts val="0"/>
+              </a:spcBef>
               <a:spcAft>
                 <a:spcPts val="200"/>
               </a:spcAft>
               <a:defRPr sz="1000" b="0">
                 <a:solidFill>
-                  <a:srgbClr val="202124"/>
+                  <a:srgbClr val="333333"/>
                 </a:solidFill>
                 <a:latin typeface="Malgun Gothic"/>
               </a:defRPr>
             </a:pPr>
             <a:r>
-              <a:t>• 중소 제조기업의 평균 불량률은 3~8%이며, 불량 1건당 원자재·설비 가동 시간·재작업 비용 포함 수십만~수백만 원의 직접 손실 발생</a:t>
-            </a:r>
-          </a:p>
-          <a:p>
-            <a:pPr algn="l">
-              <a:spcAft>
-                <a:spcPts val="200"/>
-              </a:spcAft>
-              <a:defRPr sz="1000" b="0">
-                <a:solidFill>
-                  <a:srgbClr val="202124"/>
-                </a:solidFill>
-                <a:latin typeface="Malgun Gothic"/>
-              </a:defRPr>
-            </a:pPr>
-            <a:r>
-              <a:t>• 전문 분석 인력 부재로 불량 원인 분석에 평균 2~3일 소요 → 같은 원인으로 반복 불량 발생</a:t>
-            </a:r>
-          </a:p>
-          <a:p>
-            <a:pPr algn="l">
-              <a:spcAft>
-                <a:spcPts val="800"/>
-              </a:spcAft>
-              <a:defRPr sz="1000" b="0">
-                <a:solidFill>
-                  <a:srgbClr val="202124"/>
-                </a:solidFill>
-                <a:latin typeface="Malgun Gothic"/>
-              </a:defRPr>
-            </a:pPr>
-            <a:r>
-              <a:t>• 공정 변수 간 복합적 상호작용이 불량을 유발하므로 경험만으로는 근본 원인 파악이 어려움 → AI가 반드시 필요한 영역</a:t>
-            </a:r>
-          </a:p>
-          <a:p>
-            <a:pPr algn="l">
-              <a:spcAft>
-                <a:spcPts val="200"/>
-              </a:spcAft>
-              <a:defRPr sz="1400" b="1">
-                <a:solidFill>
-                  <a:srgbClr val="202124"/>
-                </a:solidFill>
-                <a:latin typeface="Malgun Gothic"/>
-              </a:defRPr>
-            </a:pPr>
-            <a:r>
-              <a:t>KPI / 기대 변화</a:t>
-            </a:r>
-          </a:p>
-          <a:p>
-            <a:pPr algn="l">
-              <a:spcAft>
-                <a:spcPts val="200"/>
-              </a:spcAft>
-              <a:defRPr sz="1000" b="0">
-                <a:solidFill>
-                  <a:srgbClr val="202124"/>
-                </a:solidFill>
-                <a:latin typeface="Malgun Gothic"/>
-              </a:defRPr>
-            </a:pPr>
-            <a:r>
-              <a:t>• 불량 사전 감지율: 0%(사후 검사) → 70%+ 공정 중간에서 사전 예측</a:t>
-            </a:r>
-          </a:p>
-          <a:p>
-            <a:pPr algn="l">
-              <a:spcAft>
-                <a:spcPts val="200"/>
-              </a:spcAft>
-              <a:defRPr sz="1000" b="0">
-                <a:solidFill>
-                  <a:srgbClr val="202124"/>
-                </a:solidFill>
-                <a:latin typeface="Malgun Gothic"/>
-              </a:defRPr>
-            </a:pPr>
-            <a:r>
-              <a:t>• 불량 원인 분석 시간: 2~3일 → 실시간 (AI가 핵심 공정 변수와 기여도를 자동 제시)</a:t>
-            </a:r>
-          </a:p>
-          <a:p>
-            <a:pPr algn="l">
-              <a:spcAft>
-                <a:spcPts val="200"/>
-              </a:spcAft>
-              <a:defRPr sz="1000" b="0">
-                <a:solidFill>
-                  <a:srgbClr val="202124"/>
-                </a:solidFill>
-                <a:latin typeface="Malgun Gothic"/>
-              </a:defRPr>
-            </a:pPr>
-            <a:r>
-              <a:t>• 연간 불량 관련 손실 비용: 20% 이상 절감 목표</a:t>
+              <a:t>• 연간 불량 손실 비용: 20%+ 절감 목표</a:t>
             </a:r>
           </a:p>
         </p:txBody>
@@ -13114,18 +13169,21 @@
           <a:lstStyle/>
           <a:p>
             <a:pPr algn="l">
-              <a:spcAft>
-                <a:spcPts val="200"/>
+              <a:spcBef>
+                <a:spcPts val="400"/>
+              </a:spcBef>
+              <a:spcAft>
+                <a:spcPts val="100"/>
               </a:spcAft>
               <a:defRPr sz="1400" b="1">
                 <a:solidFill>
-                  <a:srgbClr val="202124"/>
+                  <a:srgbClr val="1A478A"/>
                 </a:solidFill>
                 <a:latin typeface="Malgun Gothic"/>
               </a:defRPr>
             </a:pPr>
             <a:r>
-              <a:t>제안하는 솔루션의 개요</a:t>
+              <a:t>QualityLens — AI 품질 예측·원인 분석 통합 플랫폼</a:t>
             </a:r>
             <a:endParaRPr lang="en-US" altLang="ko-KR" sz="1400" b="1" dirty="0">
               <a:solidFill>
@@ -13135,194 +13193,249 @@
           </a:p>
           <a:p>
             <a:pPr algn="l">
-              <a:spcAft>
-                <a:spcPts val="800"/>
+              <a:spcBef>
+                <a:spcPts val="0"/>
+              </a:spcBef>
+              <a:spcAft>
+                <a:spcPts val="600"/>
               </a:spcAft>
               <a:defRPr sz="1000" b="0">
                 <a:solidFill>
-                  <a:srgbClr val="202124"/>
+                  <a:srgbClr val="333333"/>
                 </a:solidFill>
                 <a:latin typeface="Malgun Gothic"/>
               </a:defRPr>
             </a:pPr>
             <a:r>
-              <a:t>본 프로젝트는 'QualityLens' — 공정 센서 데이터 기반의 AI 품질 예측·원인 분석 통합 플랫폼을 제안합니다. 공정 진행 중 실시간으로 수집되는 센서 데이터를 AI 모델이 분석하여 불량 가능성이 높은 제품을 사전에 감지하고, 설명 가능 AI(XAI)를 통해 '어떤 공정 변수가 불량을 유발하고 있는지'를 현장 작업자 눈높이에서 시각적으로 제시합니다.</a:t>
+              <a:t>공정 센서 데이터를 AI가 실시간 분석하여 불량 가능성을 사전 감지하고, 설명 가능 AI(XAI)로 '어떤 변수가 불량을 유발하는지' 현장 작업자 눈높이에서 시각 제시</a:t>
             </a:r>
           </a:p>
           <a:p>
             <a:pPr algn="l">
+              <a:spcBef>
+                <a:spcPts val="400"/>
+              </a:spcBef>
+              <a:spcAft>
+                <a:spcPts val="100"/>
+              </a:spcAft>
+              <a:defRPr sz="1400" b="1">
+                <a:solidFill>
+                  <a:srgbClr val="1A478A"/>
+                </a:solidFill>
+                <a:latin typeface="Malgun Gothic"/>
+              </a:defRPr>
+            </a:pPr>
+            <a:r>
+              <a:t>핵심 프레임워크 — Predict → Explain → Act</a:t>
+            </a:r>
+          </a:p>
+          <a:p>
+            <a:pPr algn="l">
+              <a:spcBef>
+                <a:spcPts val="0"/>
+              </a:spcBef>
               <a:spcAft>
                 <a:spcPts val="200"/>
               </a:spcAft>
+              <a:defRPr sz="1000" b="0">
+                <a:solidFill>
+                  <a:srgbClr val="333333"/>
+                </a:solidFill>
+                <a:latin typeface="Malgun Gothic"/>
+              </a:defRPr>
+            </a:pPr>
+            <a:r>
+              <a:t>• Predict: XGBoost 분류 모델 → 양품/불량 실시간 예측, MCC 기반 최적화로 클래스 불균형 극복</a:t>
+            </a:r>
+          </a:p>
+          <a:p>
+            <a:pPr algn="l">
+              <a:spcBef>
+                <a:spcPts val="0"/>
+              </a:spcBef>
+              <a:spcAft>
+                <a:spcPts val="200"/>
+              </a:spcAft>
+              <a:defRPr sz="1000" b="0">
+                <a:solidFill>
+                  <a:srgbClr val="333333"/>
+                </a:solidFill>
+                <a:latin typeface="Malgun Gothic"/>
+              </a:defRPr>
+            </a:pPr>
+            <a:r>
+              <a:t>• Explain: SHAP(TreeExplainer) → 예측 근거를 공정 변수별 기여도로 분해</a:t>
+            </a:r>
+          </a:p>
+          <a:p>
+            <a:pPr algn="l">
+              <a:spcBef>
+                <a:spcPts val="0"/>
+              </a:spcBef>
+              <a:spcAft>
+                <a:spcPts val="600"/>
+              </a:spcAft>
+              <a:defRPr sz="1000" b="0">
+                <a:solidFill>
+                  <a:srgbClr val="333333"/>
+                </a:solidFill>
+                <a:latin typeface="Malgun Gothic"/>
+              </a:defRPr>
+            </a:pPr>
+            <a:r>
+              <a:t>• Act: SHAP 기여도 + 양품 통계 기준(Threshold) 결합 → Rule-based 조치 가이드 즉시 제시</a:t>
+            </a:r>
+          </a:p>
+          <a:p>
+            <a:pPr algn="l">
+              <a:spcBef>
+                <a:spcPts val="400"/>
+              </a:spcBef>
+              <a:spcAft>
+                <a:spcPts val="100"/>
+              </a:spcAft>
               <a:defRPr sz="1400" b="1">
                 <a:solidFill>
-                  <a:srgbClr val="202124"/>
+                  <a:srgbClr val="1A478A"/>
                 </a:solidFill>
                 <a:latin typeface="Malgun Gothic"/>
               </a:defRPr>
             </a:pPr>
             <a:r>
-              <a:t>문제 해결을 위한 핵심 아이디어 — Predict → Explain → Act</a:t>
+              <a:t>플랫폼 목적</a:t>
             </a:r>
           </a:p>
           <a:p>
             <a:pPr algn="l">
+              <a:spcBef>
+                <a:spcPts val="0"/>
+              </a:spcBef>
               <a:spcAft>
                 <a:spcPts val="200"/>
               </a:spcAft>
               <a:defRPr sz="1000" b="0">
                 <a:solidFill>
-                  <a:srgbClr val="202124"/>
+                  <a:srgbClr val="333333"/>
                 </a:solidFill>
                 <a:latin typeface="Malgun Gothic"/>
               </a:defRPr>
             </a:pPr>
             <a:r>
-              <a:t>• Predict(예측): XGBoost 기반 분류 모델이 공정 센서 데이터를 입력받아 양품/불량을 실시간으로 예측. 제조 데이터의 극심한 클래스 불균형을 극복하기 위해 MCC 지표 기반 최적화 적용</a:t>
+              <a:t>데이터 분석 전문가 없이 현장 QC 담당자가 직접 활용하는 '셀프서비스형 AI 품질 관리 도구'</a:t>
             </a:r>
           </a:p>
           <a:p>
             <a:pPr algn="l">
+              <a:spcBef>
+                <a:spcPts val="0"/>
+              </a:spcBef>
+              <a:spcAft>
+                <a:spcPts val="600"/>
+              </a:spcAft>
+              <a:defRPr sz="1000" b="0">
+                <a:solidFill>
+                  <a:srgbClr val="333333"/>
+                </a:solidFill>
+                <a:latin typeface="Malgun Gothic"/>
+              </a:defRPr>
+            </a:pPr>
+            <a:r>
+              <a:t>→ 중소기업이 별도 데이터팀 없이 예방적 품질 관리 즉시 도입 가능</a:t>
+            </a:r>
+          </a:p>
+          <a:p>
+            <a:pPr algn="l">
+              <a:spcBef>
+                <a:spcPts val="400"/>
+              </a:spcBef>
+              <a:spcAft>
+                <a:spcPts val="100"/>
+              </a:spcAft>
+              <a:defRPr sz="1400" b="1">
+                <a:solidFill>
+                  <a:srgbClr val="1A478A"/>
+                </a:solidFill>
+                <a:latin typeface="Malgun Gothic"/>
+              </a:defRPr>
+            </a:pPr>
+            <a:r>
+              <a:t>전체 구성</a:t>
+            </a:r>
+          </a:p>
+          <a:p>
+            <a:pPr algn="l">
+              <a:spcBef>
+                <a:spcPts val="0"/>
+              </a:spcBef>
               <a:spcAft>
                 <a:spcPts val="200"/>
               </a:spcAft>
               <a:defRPr sz="1000" b="0">
                 <a:solidFill>
-                  <a:srgbClr val="202124"/>
+                  <a:srgbClr val="333333"/>
                 </a:solidFill>
                 <a:latin typeface="Malgun Gothic"/>
               </a:defRPr>
             </a:pPr>
             <a:r>
-              <a:t>• Explain(설명): SHAP(SHapley Additive exPlanations)이 예측 결과의 근거를 공정 변수별 기여도로 분해하여 구체적으로 제시</a:t>
+              <a:t>• 데이터 수집: 센서 파이프라인 (MVP: 오픈 데이터셋 기반 스트리밍 시뮬레이터)</a:t>
             </a:r>
           </a:p>
           <a:p>
             <a:pPr algn="l">
-              <a:spcAft>
-                <a:spcPts val="800"/>
+              <a:spcBef>
+                <a:spcPts val="0"/>
+              </a:spcBef>
+              <a:spcAft>
+                <a:spcPts val="200"/>
               </a:spcAft>
               <a:defRPr sz="1000" b="0">
                 <a:solidFill>
-                  <a:srgbClr val="202124"/>
+                  <a:srgbClr val="333333"/>
                 </a:solidFill>
                 <a:latin typeface="Malgun Gothic"/>
               </a:defRPr>
             </a:pPr>
             <a:r>
-              <a:t>• Act(조치): SHAP 기여도 분석과 정상 양품 데이터의 통계적 기준(Threshold)을 결합한 Rule-based 조치 가이드를 대시보드에 즉각 표시</a:t>
+              <a:t>• AI 엔진: XGBoost + SHAP + Threshold Engine</a:t>
             </a:r>
           </a:p>
           <a:p>
             <a:pPr algn="l">
+              <a:spcBef>
+                <a:spcPts val="0"/>
+              </a:spcBef>
               <a:spcAft>
                 <a:spcPts val="200"/>
               </a:spcAft>
-              <a:defRPr sz="1400" b="1">
-                <a:solidFill>
-                  <a:srgbClr val="202124"/>
+              <a:defRPr sz="1000" b="0">
+                <a:solidFill>
+                  <a:srgbClr val="333333"/>
                 </a:solidFill>
                 <a:latin typeface="Malgun Gothic"/>
               </a:defRPr>
             </a:pPr>
             <a:r>
-              <a:t>플랫폼의 목적 및 제공 가치</a:t>
+              <a:t>• 플랫폼 UI: Streamlit 멀티페이지 대시보드 (모니터링·예측·분석·조치·이력)</a:t>
             </a:r>
           </a:p>
           <a:p>
             <a:pPr algn="l">
-              <a:spcAft>
-                <a:spcPts val="800"/>
+              <a:spcBef>
+                <a:spcPts val="0"/>
+              </a:spcBef>
+              <a:spcAft>
+                <a:spcPts val="200"/>
               </a:spcAft>
               <a:defRPr sz="1000" b="0">
                 <a:solidFill>
-                  <a:srgbClr val="202124"/>
+                  <a:srgbClr val="333333"/>
                 </a:solidFill>
                 <a:latin typeface="Malgun Gothic"/>
               </a:defRPr>
             </a:pPr>
             <a:r>
-              <a:t>데이터 분석 전문가 없이도 현장 품질관리 담당자가 직접 활용할 수 있는 '셀프서비스형 AI 품질 관리 도구'를 제공합니다. 중소기업이 별도의 데이터팀 구축 없이 예방적 품질 관리를 즉시 도입할 수 있도록 하는 것이 목표입니다.</a:t>
-            </a:r>
-          </a:p>
-          <a:p>
-            <a:pPr algn="l">
-              <a:spcAft>
-                <a:spcPts val="200"/>
-              </a:spcAft>
-              <a:defRPr sz="1400" b="1">
-                <a:solidFill>
-                  <a:srgbClr val="202124"/>
-                </a:solidFill>
-                <a:latin typeface="Malgun Gothic"/>
-              </a:defRPr>
-            </a:pPr>
-            <a:r>
-              <a:t>전체 구성 요약</a:t>
-            </a:r>
-          </a:p>
-          <a:p>
-            <a:pPr algn="l">
-              <a:spcAft>
-                <a:spcPts val="200"/>
-              </a:spcAft>
-              <a:defRPr sz="1000" b="0">
-                <a:solidFill>
-                  <a:srgbClr val="202124"/>
-                </a:solidFill>
-                <a:latin typeface="Malgun Gothic"/>
-              </a:defRPr>
-            </a:pPr>
-            <a:r>
-              <a:t>• 데이터 수집 — 센서 데이터 파이프라인 (MVP: 오픈 데이터셋 기반 실시간 스트리밍 시뮬레이터)</a:t>
-            </a:r>
-          </a:p>
-          <a:p>
-            <a:pPr algn="l">
-              <a:spcAft>
-                <a:spcPts val="200"/>
-              </a:spcAft>
-              <a:defRPr sz="1000" b="0">
-                <a:solidFill>
-                  <a:srgbClr val="202124"/>
-                </a:solidFill>
-                <a:latin typeface="Malgun Gothic"/>
-              </a:defRPr>
-            </a:pPr>
-            <a:r>
-              <a:t>• AI 엔진 — XGBoost + SHAP + Threshold Engine (불량 예측 + 원인 분석 + 조치 근거)</a:t>
-            </a:r>
-          </a:p>
-          <a:p>
-            <a:pPr algn="l">
-              <a:spcAft>
-                <a:spcPts val="200"/>
-              </a:spcAft>
-              <a:defRPr sz="1000" b="0">
-                <a:solidFill>
-                  <a:srgbClr val="202124"/>
-                </a:solidFill>
-                <a:latin typeface="Malgun Gothic"/>
-              </a:defRPr>
-            </a:pPr>
-            <a:r>
-              <a:t>• 플랫폼 UI — Streamlit 멀티페이지 대시보드 (모니터링·예측·분석·조치·이력 관리)</a:t>
-            </a:r>
-          </a:p>
-          <a:p>
-            <a:pPr algn="l">
-              <a:spcAft>
-                <a:spcPts val="200"/>
-              </a:spcAft>
-              <a:defRPr sz="1000" b="0">
-                <a:solidFill>
-                  <a:srgbClr val="202124"/>
-                </a:solidFill>
-                <a:latin typeface="Malgun Gothic"/>
-              </a:defRPr>
-            </a:pPr>
-            <a:r>
-              <a:t>• 조치 지원 — 알림 + 원클릭 조치 가이드 (이상 감지 시 작업자 알림 및 권장 조치 제시)</a:t>
+              <a:t>• 조치 지원: 알림 + 원클릭 수용 (이상 감지 시 권장 조치 자동 제시)</a:t>
             </a:r>
           </a:p>
         </p:txBody>
@@ -14106,12 +14219,15 @@
           <a:lstStyle/>
           <a:p>
             <a:pPr algn="l">
-              <a:spcAft>
-                <a:spcPts val="200"/>
-              </a:spcAft>
-              <a:defRPr sz="1300" b="1">
-                <a:solidFill>
-                  <a:srgbClr val="202124"/>
+              <a:spcBef>
+                <a:spcPts val="400"/>
+              </a:spcBef>
+              <a:spcAft>
+                <a:spcPts val="100"/>
+              </a:spcAft>
+              <a:defRPr sz="1400" b="1">
+                <a:solidFill>
+                  <a:srgbClr val="1A478A"/>
                 </a:solidFill>
                 <a:latin typeface="Malgun Gothic"/>
               </a:defRPr>
@@ -14127,146 +14243,287 @@
           </a:p>
           <a:p>
             <a:pPr algn="l">
-              <a:spcAft>
-                <a:spcPts val="800"/>
+              <a:spcBef>
+                <a:spcPts val="0"/>
+              </a:spcBef>
+              <a:spcAft>
+                <a:spcPts val="200"/>
               </a:spcAft>
               <a:defRPr sz="1000" b="0">
                 <a:solidFill>
-                  <a:srgbClr val="202124"/>
+                  <a:srgbClr val="333333"/>
                 </a:solidFill>
                 <a:latin typeface="Malgun Gothic"/>
               </a:defRPr>
             </a:pPr>
             <a:r>
-              <a:t>공정 센서 데이터를 실시간으로 수집·시각화하고, XGBoost 모델이 배치별 양품/불량 확률을 산출합니다. 핵심 센서의 정상/경고/위험 상태를 3단계 컬러 코딩으로 표시하여, 비전문가도 즉시 공정 이상을 인지할 수 있습니다. 클래스 불균형 환경에서의 신뢰성 확보를 위해 MCC 기반 모델 평가를 적용합니다.</a:t>
+              <a:t>센서 데이터 실시간 수집·시각화, XGBoost 모델이 배치별 양품/불량 확률 산출</a:t>
             </a:r>
           </a:p>
           <a:p>
             <a:pPr algn="l">
+              <a:spcBef>
+                <a:spcPts val="0"/>
+              </a:spcBef>
+              <a:spcAft>
+                <a:spcPts val="600"/>
+              </a:spcAft>
+              <a:defRPr sz="1000" b="0">
+                <a:solidFill>
+                  <a:srgbClr val="333333"/>
+                </a:solidFill>
+                <a:latin typeface="Malgun Gothic"/>
+              </a:defRPr>
+            </a:pPr>
+            <a:r>
+              <a:t>정상/경고/위험 3단계 컬러 코딩 → 비전문가도 즉시 이상 인지. MCC 기반 모델 평가 적용</a:t>
+            </a:r>
+          </a:p>
+          <a:p>
+            <a:pPr algn="l">
+              <a:spcBef>
+                <a:spcPts val="400"/>
+              </a:spcBef>
+              <a:spcAft>
+                <a:spcPts val="100"/>
+              </a:spcAft>
+              <a:defRPr sz="1400" b="1">
+                <a:solidFill>
+                  <a:srgbClr val="1A478A"/>
+                </a:solidFill>
+                <a:latin typeface="Malgun Gothic"/>
+              </a:defRPr>
+            </a:pPr>
+            <a:r>
+              <a:t>기능 2 — XAI 기반 불량 원인 분석 (Explain)</a:t>
+            </a:r>
+          </a:p>
+          <a:p>
+            <a:pPr algn="l">
+              <a:spcBef>
+                <a:spcPts val="0"/>
+              </a:spcBef>
               <a:spcAft>
                 <a:spcPts val="200"/>
               </a:spcAft>
-              <a:defRPr sz="1300" b="1">
-                <a:solidFill>
-                  <a:srgbClr val="202124"/>
+              <a:defRPr sz="1000" b="0">
+                <a:solidFill>
+                  <a:srgbClr val="333333"/>
                 </a:solidFill>
                 <a:latin typeface="Malgun Gothic"/>
               </a:defRPr>
             </a:pPr>
             <a:r>
-              <a:t>기능 2 — XAI 기반 불량 원인 분석 (Explain)</a:t>
+              <a:t>SHAP으로 예측 근거를 공정 변수별 기여도로 분해</a:t>
             </a:r>
           </a:p>
           <a:p>
             <a:pPr algn="l">
-              <a:spcAft>
-                <a:spcPts val="800"/>
+              <a:spcBef>
+                <a:spcPts val="0"/>
+              </a:spcBef>
+              <a:spcAft>
+                <a:spcPts val="600"/>
               </a:spcAft>
               <a:defRPr sz="1000" b="0">
                 <a:solidFill>
-                  <a:srgbClr val="202124"/>
+                  <a:srgbClr val="333333"/>
                 </a:solidFill>
                 <a:latin typeface="Malgun Gothic"/>
               </a:defRPr>
             </a:pPr>
             <a:r>
-              <a:t>SHAP을 활용하여 모델의 예측 근거를 공정 변수별 기여도로 분해합니다. 글로벌 피처 중요도(전체 트렌드)와 개별 Waterfall(건별 원인)을 모두 제공하여, '전체적으로 어떤 변수가 중요한지'와 '이 배치가 왜 불량인지'를 동시에 파악할 수 있습니다.</a:t>
+              <a:t>글로벌 피처 중요도(전체 트렌드) + 개별 Waterfall(건별 원인) 동시 제공</a:t>
             </a:r>
           </a:p>
           <a:p>
             <a:pPr algn="l">
+              <a:spcBef>
+                <a:spcPts val="400"/>
+              </a:spcBef>
+              <a:spcAft>
+                <a:spcPts val="100"/>
+              </a:spcAft>
+              <a:defRPr sz="1400" b="1">
+                <a:solidFill>
+                  <a:srgbClr val="1A478A"/>
+                </a:solidFill>
+                <a:latin typeface="Malgun Gothic"/>
+              </a:defRPr>
+            </a:pPr>
+            <a:r>
+              <a:t>기능 3 — 조치 가이드 &amp; 이력 관리 (Act)</a:t>
+            </a:r>
+          </a:p>
+          <a:p>
+            <a:pPr algn="l">
+              <a:spcBef>
+                <a:spcPts val="0"/>
+              </a:spcBef>
               <a:spcAft>
                 <a:spcPts val="200"/>
               </a:spcAft>
-              <a:defRPr sz="1300" b="1">
-                <a:solidFill>
-                  <a:srgbClr val="202124"/>
+              <a:defRPr sz="1000" b="0">
+                <a:solidFill>
+                  <a:srgbClr val="333333"/>
                 </a:solidFill>
                 <a:latin typeface="Malgun Gothic"/>
               </a:defRPr>
             </a:pPr>
             <a:r>
-              <a:t>기능 3 — 조치 가이드 &amp; 이력 관리 (Act)</a:t>
+              <a:t>SHAP 지목 이상 변수 + 양품 통계 정상 범위(Threshold) 비교·분석</a:t>
             </a:r>
           </a:p>
           <a:p>
             <a:pPr algn="l">
-              <a:spcAft>
-                <a:spcPts val="800"/>
+              <a:spcBef>
+                <a:spcPts val="0"/>
+              </a:spcBef>
+              <a:spcAft>
+                <a:spcPts val="200"/>
               </a:spcAft>
               <a:defRPr sz="1000" b="0">
                 <a:solidFill>
-                  <a:srgbClr val="202124"/>
+                  <a:srgbClr val="333333"/>
                 </a:solidFill>
                 <a:latin typeface="Malgun Gothic"/>
               </a:defRPr>
             </a:pPr>
             <a:r>
-              <a:t>SHAP이 지목한 핵심 이상 변수와 과거 양품 데이터의 통계적 정상 범위(Threshold)를 비교·분석하여, 현장 작업자에게 구체적인 조치 방향(예: '온도 센서 비정상 상승 감지 → 정상 권장 범위 165~175°C로 하향 조정 요망')을 대시보드에 즉각 팝업 형태로 제시합니다. 원클릭 수용 버튼으로 조치 이력이 자동 기록됩니다.</a:t>
+              <a:t>→ 구체적 조치 방향 팝업 제시 (예: '온도 165~175°C로 하향 조정 요망')</a:t>
             </a:r>
           </a:p>
           <a:p>
             <a:pPr algn="l">
+              <a:spcBef>
+                <a:spcPts val="0"/>
+              </a:spcBef>
+              <a:spcAft>
+                <a:spcPts val="600"/>
+              </a:spcAft>
+              <a:defRPr sz="1000" b="0">
+                <a:solidFill>
+                  <a:srgbClr val="333333"/>
+                </a:solidFill>
+                <a:latin typeface="Malgun Gothic"/>
+              </a:defRPr>
+            </a:pPr>
+            <a:r>
+              <a:t>→ 원클릭 수용 버튼으로 조치 이력 자동 기록</a:t>
+            </a:r>
+          </a:p>
+          <a:p>
+            <a:pPr algn="l">
+              <a:spcBef>
+                <a:spcPts val="400"/>
+              </a:spcBef>
+              <a:spcAft>
+                <a:spcPts val="100"/>
+              </a:spcAft>
+              <a:defRPr sz="1400" b="1">
+                <a:solidFill>
+                  <a:srgbClr val="1A478A"/>
+                </a:solidFill>
+                <a:latin typeface="Malgun Gothic"/>
+              </a:defRPr>
+            </a:pPr>
+            <a:r>
+              <a:t>기능 간 연계 — 순환 루프</a:t>
+            </a:r>
+          </a:p>
+          <a:p>
+            <a:pPr algn="l">
+              <a:spcBef>
+                <a:spcPts val="0"/>
+              </a:spcBef>
               <a:spcAft>
                 <a:spcPts val="200"/>
               </a:spcAft>
-              <a:defRPr sz="1300" b="1">
-                <a:solidFill>
-                  <a:srgbClr val="202124"/>
+              <a:defRPr sz="1000" b="0">
+                <a:solidFill>
+                  <a:srgbClr val="333333"/>
                 </a:solidFill>
                 <a:latin typeface="Malgun Gothic"/>
               </a:defRPr>
             </a:pPr>
             <a:r>
-              <a:t>기능 간 연계 방식</a:t>
+              <a:t>예측 결과 → 원인 분석 입력 → 조치 가이드 근거 → 피드백 → 예측 모델 재학습</a:t>
             </a:r>
           </a:p>
           <a:p>
             <a:pPr algn="l">
-              <a:spcAft>
-                <a:spcPts val="800"/>
+              <a:spcBef>
+                <a:spcPts val="0"/>
+              </a:spcBef>
+              <a:spcAft>
+                <a:spcPts val="600"/>
               </a:spcAft>
               <a:defRPr sz="1000" b="0">
                 <a:solidFill>
-                  <a:srgbClr val="202124"/>
+                  <a:srgbClr val="333333"/>
                 </a:solidFill>
                 <a:latin typeface="Malgun Gothic"/>
               </a:defRPr>
             </a:pPr>
             <a:r>
-              <a:t>세 기능은 독립적이지 않고 순환 루프를 구성합니다 — 예측 결과가 원인 분석의 입력이 되고, 분석 결과가 조치 가이드의 근거가 되며, 조치 결과가 다시 예측 모델의 학습 데이터로 피드백됩니다. 종합 대시보드(P1)가 이 전체 흐름의 허브 역할을 합니다.</a:t>
+              <a:t>종합 대시보드(P1)가 전체 흐름의 허브 역할</a:t>
             </a:r>
           </a:p>
           <a:p>
             <a:pPr algn="l">
+              <a:spcBef>
+                <a:spcPts val="400"/>
+              </a:spcBef>
+              <a:spcAft>
+                <a:spcPts val="100"/>
+              </a:spcAft>
+              <a:defRPr sz="1400" b="1">
+                <a:solidFill>
+                  <a:srgbClr val="1A478A"/>
+                </a:solidFill>
+                <a:latin typeface="Malgun Gothic"/>
+              </a:defRPr>
+            </a:pPr>
+            <a:r>
+              <a:t>본선 MVP</a:t>
+            </a:r>
+          </a:p>
+          <a:p>
+            <a:pPr algn="l">
+              <a:spcBef>
+                <a:spcPts val="0"/>
+              </a:spcBef>
               <a:spcAft>
                 <a:spcPts val="200"/>
               </a:spcAft>
-              <a:defRPr sz="1300" b="1">
-                <a:solidFill>
-                  <a:srgbClr val="202124"/>
+              <a:defRPr sz="1000" b="0">
+                <a:solidFill>
+                  <a:srgbClr val="333333"/>
                 </a:solidFill>
                 <a:latin typeface="Malgun Gothic"/>
               </a:defRPr>
             </a:pPr>
             <a:r>
-              <a:t>본선 MVP 핵심 기능</a:t>
+              <a:t>P1(대시보드) + P2(예측) + P3(분석): 완전 구현</a:t>
             </a:r>
           </a:p>
           <a:p>
             <a:pPr algn="l">
+              <a:spcBef>
+                <a:spcPts val="0"/>
+              </a:spcBef>
               <a:spcAft>
                 <a:spcPts val="200"/>
               </a:spcAft>
               <a:defRPr sz="1000" b="0">
                 <a:solidFill>
-                  <a:srgbClr val="202124"/>
+                  <a:srgbClr val="333333"/>
                 </a:solidFill>
                 <a:latin typeface="Malgun Gothic"/>
               </a:defRPr>
             </a:pPr>
             <a:r>
-              <a:t>P1(종합 대시보드), P2(실시간 예측), P3(원인 분석)의 완전한 파이프라인 구현을 필수로 진행합니다. P4(조치 가이드)는 핵심 불량 시나리오를 가정한 데모 화면을 구성하여, 예측부터 조치까지의 End-to-End 사용자 경험을 완벽하게 시연할 계획입니다.</a:t>
+              <a:t>P4(조치 가이드): 핵심 불량 시나리오 데모 구현 → End-to-End 사용자 경험 시연</a:t>
             </a:r>
           </a:p>
         </p:txBody>
@@ -15074,18 +15331,21 @@
           <a:lstStyle/>
           <a:p>
             <a:pPr algn="l">
-              <a:spcAft>
-                <a:spcPts val="200"/>
-              </a:spcAft>
-              <a:defRPr sz="1300" b="1">
-                <a:solidFill>
-                  <a:srgbClr val="202124"/>
+              <a:spcBef>
+                <a:spcPts val="400"/>
+              </a:spcBef>
+              <a:spcAft>
+                <a:spcPts val="100"/>
+              </a:spcAft>
+              <a:defRPr sz="1400" b="1">
+                <a:solidFill>
+                  <a:srgbClr val="1A478A"/>
                 </a:solidFill>
                 <a:latin typeface="Malgun Gothic"/>
               </a:defRPr>
             </a:pPr>
             <a:r>
-              <a:t>활용할 데이터 종류 및 특성</a:t>
+              <a:t>활용 데이터</a:t>
             </a:r>
             <a:endParaRPr lang="en-US" altLang="ko-KR" sz="1400" b="1" dirty="0">
               <a:solidFill>
@@ -15095,258 +15355,306 @@
           </a:p>
           <a:p>
             <a:pPr algn="l">
+              <a:spcBef>
+                <a:spcPts val="0"/>
+              </a:spcBef>
               <a:spcAft>
                 <a:spcPts val="200"/>
               </a:spcAft>
               <a:defRPr sz="1000" b="0">
                 <a:solidFill>
+                  <a:srgbClr val="333333"/>
+                </a:solidFill>
+                <a:latin typeface="Malgun Gothic"/>
+              </a:defRPr>
+            </a:pPr>
+            <a:r>
+              <a:t>• 주 데이터셋: UCI SECOM — 실제 반도체 제조 라인 (1,567샘플 × 591센서, 불량 104건/6.6%)</a:t>
+            </a:r>
+          </a:p>
+          <a:p>
+            <a:pPr algn="l">
+              <a:spcBef>
+                <a:spcPts val="0"/>
+              </a:spcBef>
+              <a:spcAft>
+                <a:spcPts val="600"/>
+              </a:spcAft>
+              <a:defRPr sz="1000" b="0">
+                <a:solidFill>
+                  <a:srgbClr val="333333"/>
+                </a:solidFill>
+                <a:latin typeface="Malgun Gothic"/>
+              </a:defRPr>
+            </a:pPr>
+            <a:r>
+              <a:t>• 보조 데이터셋: Kaggle Smart Manufacturing — 직관적 공정 파라미터(온도/압력/진동/유량) 보강용</a:t>
+            </a:r>
+          </a:p>
+          <a:p>
+            <a:pPr algn="l">
+              <a:spcBef>
+                <a:spcPts val="400"/>
+              </a:spcBef>
+              <a:spcAft>
+                <a:spcPts val="100"/>
+              </a:spcAft>
+              <a:defRPr sz="1400" b="1">
+                <a:solidFill>
+                  <a:srgbClr val="1A478A"/>
+                </a:solidFill>
+                <a:latin typeface="Malgun Gothic"/>
+              </a:defRPr>
+            </a:pPr>
+            <a:r>
+              <a:t>데이터 처리</a:t>
+            </a:r>
+          </a:p>
+          <a:p>
+            <a:pPr algn="l">
+              <a:spcBef>
+                <a:spcPts val="0"/>
+              </a:spcBef>
+              <a:spcAft>
+                <a:spcPts val="200"/>
+              </a:spcAft>
+              <a:defRPr sz="1000" b="0">
+                <a:solidFill>
+                  <a:srgbClr val="333333"/>
+                </a:solidFill>
+                <a:latin typeface="Malgun Gothic"/>
+              </a:defRPr>
+            </a:pPr>
+            <a:r>
+              <a:t>• 결측치: 센서별 결측률 분석 → 고결측 피처 제거 + KNN Imputation</a:t>
+            </a:r>
+          </a:p>
+          <a:p>
+            <a:pPr algn="l">
+              <a:spcBef>
+                <a:spcPts val="0"/>
+              </a:spcBef>
+              <a:spcAft>
+                <a:spcPts val="200"/>
+              </a:spcAft>
+              <a:defRPr sz="1000" b="0">
+                <a:solidFill>
+                  <a:srgbClr val="333333"/>
+                </a:solidFill>
+                <a:latin typeface="Malgun Gothic"/>
+              </a:defRPr>
+            </a:pPr>
+            <a:r>
+              <a:t>• 피처 선택: 분산 필터링 + 상관관계 중복 제거 → 상위 50~80개 핵심 피처</a:t>
+            </a:r>
+          </a:p>
+          <a:p>
+            <a:pPr algn="l">
+              <a:spcBef>
+                <a:spcPts val="0"/>
+              </a:spcBef>
+              <a:spcAft>
+                <a:spcPts val="600"/>
+              </a:spcAft>
+              <a:defRPr sz="1000" b="0">
+                <a:solidFill>
+                  <a:srgbClr val="333333"/>
+                </a:solidFill>
+                <a:latin typeface="Malgun Gothic"/>
+              </a:defRPr>
+            </a:pPr>
+            <a:r>
+              <a:t>• 데이터 누수 방지: Stratified Split → Train에만 SMOTE·정규화 적용 (엄격한 Pipeline 구축)</a:t>
+            </a:r>
+          </a:p>
+          <a:p>
+            <a:pPr algn="l">
+              <a:spcBef>
+                <a:spcPts val="400"/>
+              </a:spcBef>
+              <a:spcAft>
+                <a:spcPts val="100"/>
+              </a:spcAft>
+              <a:defRPr sz="1400" b="1">
+                <a:solidFill>
+                  <a:srgbClr val="1A478A"/>
+                </a:solidFill>
+                <a:latin typeface="Malgun Gothic"/>
+              </a:defRPr>
+            </a:pPr>
+            <a:r>
+              <a:t>AI/분석 기술</a:t>
+            </a:r>
+          </a:p>
+          <a:p>
+            <a:pPr algn="l">
+              <a:spcBef>
+                <a:spcPts val="0"/>
+              </a:spcBef>
+              <a:spcAft>
+                <a:spcPts val="200"/>
+              </a:spcAft>
+              <a:defRPr sz="1000" b="0">
+                <a:solidFill>
+                  <a:srgbClr val="333333"/>
+                </a:solidFill>
+                <a:latin typeface="Malgun Gothic"/>
+              </a:defRPr>
+            </a:pPr>
+            <a:r>
+              <a:t>• XGBoost: 비선형 상호작용 학습, 빠른 추론, GPU 불필요</a:t>
+            </a:r>
+          </a:p>
+          <a:p>
+            <a:pPr algn="l">
+              <a:spcBef>
+                <a:spcPts val="0"/>
+              </a:spcBef>
+              <a:spcAft>
+                <a:spcPts val="200"/>
+              </a:spcAft>
+              <a:defRPr sz="1000" b="0">
+                <a:solidFill>
+                  <a:srgbClr val="333333"/>
+                </a:solidFill>
+                <a:latin typeface="Malgun Gothic"/>
+              </a:defRPr>
+            </a:pPr>
+            <a:r>
+              <a:t>• SHAP (TreeExplainer): 개별 예측의 피처별 기여도 실시간 분해</a:t>
+            </a:r>
+          </a:p>
+          <a:p>
+            <a:pPr algn="l">
+              <a:spcBef>
+                <a:spcPts val="0"/>
+              </a:spcBef>
+              <a:spcAft>
+                <a:spcPts val="200"/>
+              </a:spcAft>
+              <a:defRPr sz="1000" b="0">
+                <a:solidFill>
+                  <a:srgbClr val="333333"/>
+                </a:solidFill>
+                <a:latin typeface="Malgun Gothic"/>
+              </a:defRPr>
+            </a:pPr>
+            <a:r>
+              <a:t>• Threshold Engine: 양품 통계 기준으로 조치 방향 및 권장 범위 자동 생성</a:t>
+            </a:r>
+          </a:p>
+          <a:p>
+            <a:pPr algn="l">
+              <a:spcBef>
+                <a:spcPts val="0"/>
+              </a:spcBef>
+              <a:spcAft>
+                <a:spcPts val="400"/>
+              </a:spcAft>
+              <a:defRPr sz="1000" b="0">
+                <a:solidFill>
+                  <a:srgbClr val="333333"/>
+                </a:solidFill>
+                <a:latin typeface="Malgun Gothic"/>
+              </a:defRPr>
+            </a:pPr>
+            <a:r>
+              <a:t>• 평가 지표: MCC(주) + Precision-Recall, F1-Score(보조)</a:t>
+            </a:r>
+          </a:p>
+          <a:p>
+            <a:pPr algn="l">
+              <a:spcBef>
+                <a:spcPts val="300"/>
+              </a:spcBef>
+              <a:spcAft>
+                <a:spcPts val="600"/>
+              </a:spcAft>
+              <a:defRPr sz="1200" b="1">
+                <a:solidFill>
                   <a:srgbClr val="202124"/>
                 </a:solidFill>
                 <a:latin typeface="Malgun Gothic"/>
               </a:defRPr>
             </a:pPr>
             <a:r>
-              <a:t>• 주 데이터셋: UCI SECOM — 실제 반도체 제조 라인 데이터 (1,567샘플 × 591센서, 불량 104건/6.6%)</a:t>
+              <a:t>기술 스택: Streamlit | XGBoost | SHAP | Plotly | Pandas | scikit-learn | imbalanced-learn</a:t>
             </a:r>
           </a:p>
           <a:p>
             <a:pPr algn="l">
-              <a:spcAft>
-                <a:spcPts val="600"/>
+              <a:spcBef>
+                <a:spcPts val="400"/>
+              </a:spcBef>
+              <a:spcAft>
+                <a:spcPts val="100"/>
+              </a:spcAft>
+              <a:defRPr sz="1400" b="1">
+                <a:solidFill>
+                  <a:srgbClr val="1A478A"/>
+                </a:solidFill>
+                <a:latin typeface="Malgun Gothic"/>
+              </a:defRPr>
+            </a:pPr>
+            <a:r>
+              <a:t>기술적 제약 → 해결 전략</a:t>
+            </a:r>
+          </a:p>
+          <a:p>
+            <a:pPr algn="l">
+              <a:spcBef>
+                <a:spcPts val="0"/>
+              </a:spcBef>
+              <a:spcAft>
+                <a:spcPts val="200"/>
               </a:spcAft>
               <a:defRPr sz="1000" b="0">
                 <a:solidFill>
-                  <a:srgbClr val="202124"/>
+                  <a:srgbClr val="333333"/>
                 </a:solidFill>
                 <a:latin typeface="Malgun Gothic"/>
               </a:defRPr>
             </a:pPr>
             <a:r>
-              <a:t>• 보조 데이터셋: Kaggle Smart Manufacturing Process Data — 직관적 공정 파라미터(온도/압력/진동/유량) 보강용</a:t>
+              <a:t>• 컴퓨팅 미제공 → Streamlit + XGBoost 로컬 구동 (GPU 불필요)</a:t>
             </a:r>
           </a:p>
           <a:p>
             <a:pPr algn="l">
+              <a:spcBef>
+                <a:spcPts val="0"/>
+              </a:spcBef>
               <a:spcAft>
                 <a:spcPts val="200"/>
               </a:spcAft>
-              <a:defRPr sz="1300" b="1">
-                <a:solidFill>
-                  <a:srgbClr val="202124"/>
+              <a:defRPr sz="1000" b="0">
+                <a:solidFill>
+                  <a:srgbClr val="333333"/>
                 </a:solidFill>
                 <a:latin typeface="Malgun Gothic"/>
               </a:defRPr>
             </a:pPr>
             <a:r>
-              <a:t>데이터 처리 방식</a:t>
+              <a:t>• 실시간 연동 불가 → 오픈 데이터 기반 스트리밍 시뮬레이터</a:t>
             </a:r>
           </a:p>
           <a:p>
             <a:pPr algn="l">
+              <a:spcBef>
+                <a:spcPts val="0"/>
+              </a:spcBef>
               <a:spcAft>
                 <a:spcPts val="200"/>
               </a:spcAft>
               <a:defRPr sz="1000" b="0">
                 <a:solidFill>
-                  <a:srgbClr val="202124"/>
+                  <a:srgbClr val="333333"/>
                 </a:solidFill>
                 <a:latin typeface="Malgun Gothic"/>
               </a:defRPr>
             </a:pPr>
             <a:r>
-              <a:t>• 결측치 처리: 센서별 결측률 분석 → 고결측 피처 제거 + KNN Imputation</a:t>
-            </a:r>
-          </a:p>
-          <a:p>
-            <a:pPr algn="l">
-              <a:spcAft>
-                <a:spcPts val="200"/>
-              </a:spcAft>
-              <a:defRPr sz="1000" b="0">
-                <a:solidFill>
-                  <a:srgbClr val="202124"/>
-                </a:solidFill>
-                <a:latin typeface="Malgun Gothic"/>
-              </a:defRPr>
-            </a:pPr>
-            <a:r>
-              <a:t>• 피처 선택: 분산 기반 필터링 + 상관관계 기반 중복 제거 → 상위 50~80개 핵심 피처 추출</a:t>
-            </a:r>
-          </a:p>
-          <a:p>
-            <a:pPr algn="l">
-              <a:spcAft>
-                <a:spcPts val="600"/>
-              </a:spcAft>
-              <a:defRPr sz="1000" b="0">
-                <a:solidFill>
-                  <a:srgbClr val="202124"/>
-                </a:solidFill>
-                <a:latin typeface="Malgun Gothic"/>
-              </a:defRPr>
-            </a:pPr>
-            <a:r>
-              <a:t>• 클래스 밸런싱 &amp; 데이터 누수 방지: Stratified Split 이후 Train 데이터에만 SMOTE·정규화 적용하는 엄격한 Pipeline 구축으로 Data Leakage 차단</a:t>
-            </a:r>
-          </a:p>
-          <a:p>
-            <a:pPr algn="l">
-              <a:spcAft>
-                <a:spcPts val="200"/>
-              </a:spcAft>
-              <a:defRPr sz="1300" b="1">
-                <a:solidFill>
-                  <a:srgbClr val="202124"/>
-                </a:solidFill>
-                <a:latin typeface="Malgun Gothic"/>
-              </a:defRPr>
-            </a:pPr>
-            <a:r>
-              <a:t>적용할 AI/분석 기술</a:t>
-            </a:r>
-          </a:p>
-          <a:p>
-            <a:pPr algn="l">
-              <a:spcAft>
-                <a:spcPts val="200"/>
-              </a:spcAft>
-              <a:defRPr sz="1000" b="0">
-                <a:solidFill>
-                  <a:srgbClr val="202124"/>
-                </a:solidFill>
-                <a:latin typeface="Malgun Gothic"/>
-              </a:defRPr>
-            </a:pPr>
-            <a:r>
-              <a:t>• XGBoost 분류 모델: 센서 데이터의 비선형 상호작용 학습, 빠른 추론 속도, GPU 불필요</a:t>
-            </a:r>
-          </a:p>
-          <a:p>
-            <a:pPr algn="l">
-              <a:spcAft>
-                <a:spcPts val="200"/>
-              </a:spcAft>
-              <a:defRPr sz="1000" b="0">
-                <a:solidFill>
-                  <a:srgbClr val="202124"/>
-                </a:solidFill>
-                <a:latin typeface="Malgun Gothic"/>
-              </a:defRPr>
-            </a:pPr>
-            <a:r>
-              <a:t>• SHAP (TreeExplainer): XGBoost 전용 고속 SHAP 연산으로 개별 예측의 피처별 기여도 실시간 분해</a:t>
-            </a:r>
-          </a:p>
-          <a:p>
-            <a:pPr algn="l">
-              <a:spcAft>
-                <a:spcPts val="200"/>
-              </a:spcAft>
-              <a:defRPr sz="1000" b="0">
-                <a:solidFill>
-                  <a:srgbClr val="202124"/>
-                </a:solidFill>
-                <a:latin typeface="Malgun Gothic"/>
-              </a:defRPr>
-            </a:pPr>
-            <a:r>
-              <a:t>• Threshold Engine: 양품 데이터의 센서별 통계 기준으로 조치 방향과 권장 범위 자동 생성</a:t>
-            </a:r>
-          </a:p>
-          <a:p>
-            <a:pPr algn="l">
-              <a:spcAft>
-                <a:spcPts val="600"/>
-              </a:spcAft>
-              <a:defRPr sz="1000" b="0">
-                <a:solidFill>
-                  <a:srgbClr val="202124"/>
-                </a:solidFill>
-                <a:latin typeface="Malgun Gothic"/>
-              </a:defRPr>
-            </a:pPr>
-            <a:r>
-              <a:t>• 평가 지표: MCC(Matthews Correlation Coefficient) 주요 지표 + Precision-Recall 커브, F1-Score 보조</a:t>
-            </a:r>
-          </a:p>
-          <a:p>
-            <a:pPr algn="l">
-              <a:spcAft>
-                <a:spcPts val="600"/>
-              </a:spcAft>
-              <a:defRPr sz="1100" b="1">
-                <a:solidFill>
-                  <a:srgbClr val="202124"/>
-                </a:solidFill>
-                <a:latin typeface="Malgun Gothic"/>
-              </a:defRPr>
-            </a:pPr>
-            <a:r>
-              <a:t>기술 스택: Streamlit | XGBoost | SHAP | Plotly | Pandas | scikit-learn | imbalanced-learn</a:t>
-            </a:r>
-          </a:p>
-          <a:p>
-            <a:pPr algn="l">
-              <a:spcAft>
-                <a:spcPts val="200"/>
-              </a:spcAft>
-              <a:defRPr sz="1300" b="1">
-                <a:solidFill>
-                  <a:srgbClr val="202124"/>
-                </a:solidFill>
-                <a:latin typeface="Malgun Gothic"/>
-              </a:defRPr>
-            </a:pPr>
-            <a:r>
-              <a:t>기술적 제약 및 해결 전략</a:t>
-            </a:r>
-          </a:p>
-          <a:p>
-            <a:pPr algn="l">
-              <a:spcAft>
-                <a:spcPts val="200"/>
-              </a:spcAft>
-              <a:defRPr sz="1000" b="0">
-                <a:solidFill>
-                  <a:srgbClr val="202124"/>
-                </a:solidFill>
-                <a:latin typeface="Malgun Gothic"/>
-              </a:defRPr>
-            </a:pPr>
-            <a:r>
-              <a:t>• 컴퓨팅 리소스 미제공 → Streamlit + XGBoost는 로컬 노트북에서 충분히 구동 (GPU 불필요)</a:t>
-            </a:r>
-          </a:p>
-          <a:p>
-            <a:pPr algn="l">
-              <a:spcAft>
-                <a:spcPts val="200"/>
-              </a:spcAft>
-              <a:defRPr sz="1000" b="0">
-                <a:solidFill>
-                  <a:srgbClr val="202124"/>
-                </a:solidFill>
-                <a:latin typeface="Malgun Gothic"/>
-              </a:defRPr>
-            </a:pPr>
-            <a:r>
-              <a:t>• 실시간 센서 연동 불가 → 오픈 데이터셋 기반 스트리밍 시뮬레이터로 실시간 환경 재현</a:t>
-            </a:r>
-          </a:p>
-          <a:p>
-            <a:pPr algn="l">
-              <a:spcAft>
-                <a:spcPts val="200"/>
-              </a:spcAft>
-              <a:defRPr sz="1000" b="0">
-                <a:solidFill>
-                  <a:srgbClr val="202124"/>
-                </a:solidFill>
-                <a:latin typeface="Malgun Gothic"/>
-              </a:defRPr>
-            </a:pPr>
-            <a:r>
-              <a:t>• 데이터 불균형 (6.6% 불량) → SMOTE + MCC 평가 + Stratified K-Fold 교차 검증</a:t>
+              <a:t>• 데이터 불균형(6.6%) → SMOTE + MCC + Stratified K-Fold</a:t>
             </a:r>
           </a:p>
         </p:txBody>
@@ -16134,10 +16442,105 @@
           <a:lstStyle/>
           <a:p>
             <a:pPr algn="l">
+              <a:spcBef>
+                <a:spcPts val="400"/>
+              </a:spcBef>
+              <a:spcAft>
+                <a:spcPts val="100"/>
+              </a:spcAft>
+              <a:defRPr sz="1400" b="1">
+                <a:solidFill>
+                  <a:srgbClr val="1A478A"/>
+                </a:solidFill>
+                <a:latin typeface="Malgun Gothic"/>
+              </a:defRPr>
+            </a:pPr>
+            <a:r>
+              <a:t>주요 사용자</a:t>
+            </a:r>
+          </a:p>
+          <a:p>
+            <a:pPr algn="l">
+              <a:spcBef>
+                <a:spcPts val="0"/>
+              </a:spcBef>
               <a:spcAft>
                 <a:spcPts val="200"/>
               </a:spcAft>
-              <a:defRPr sz="1300" b="1">
+              <a:defRPr sz="1000" b="0">
+                <a:solidFill>
+                  <a:srgbClr val="333333"/>
+                </a:solidFill>
+                <a:latin typeface="Malgun Gothic"/>
+              </a:defRPr>
+            </a:pPr>
+            <a:r>
+              <a:t>• 페르소나 A — 김 과장 (QC): 공정 경력 8년, 데이터 분석 무경험. 매일 P1~P4 전체 사용</a:t>
+            </a:r>
+          </a:p>
+          <a:p>
+            <a:pPr algn="l">
+              <a:spcBef>
+                <a:spcPts val="0"/>
+              </a:spcBef>
+              <a:spcAft>
+                <a:spcPts val="600"/>
+              </a:spcAft>
+              <a:defRPr sz="1000" b="0">
+                <a:solidFill>
+                  <a:srgbClr val="333333"/>
+                </a:solidFill>
+                <a:latin typeface="Malgun Gothic"/>
+              </a:defRPr>
+            </a:pPr>
+            <a:r>
+              <a:t>• 페르소나 B — 박 팀장 (생산): 주간 리포트 검토, 의사결정권자. 주 1~2회 P1, P5 활용</a:t>
+            </a:r>
+          </a:p>
+          <a:p>
+            <a:pPr algn="l">
+              <a:spcBef>
+                <a:spcPts val="400"/>
+              </a:spcBef>
+              <a:spcAft>
+                <a:spcPts val="100"/>
+              </a:spcAft>
+              <a:defRPr sz="1400" b="1">
+                <a:solidFill>
+                  <a:srgbClr val="1A478A"/>
+                </a:solidFill>
+                <a:latin typeface="Malgun Gothic"/>
+              </a:defRPr>
+            </a:pPr>
+            <a:r>
+              <a:t>대표 시나리오: 식각 공정 온도 이상 → 불량 급증 대응</a:t>
+            </a:r>
+          </a:p>
+          <a:p>
+            <a:pPr algn="l">
+              <a:spcBef>
+                <a:spcPts val="0"/>
+              </a:spcBef>
+              <a:spcAft>
+                <a:spcPts val="200"/>
+              </a:spcAft>
+              <a:defRPr sz="400" b="0">
+                <a:solidFill>
+                  <a:srgbClr val="333333"/>
+                </a:solidFill>
+                <a:latin typeface="Malgun Gothic"/>
+              </a:defRPr>
+            </a:pPr>
+          </a:p>
+          <a:p>
+            <a:pPr algn="l">
+              <a:spcBef>
+                <a:spcPts val="300"/>
+              </a:spcBef>
+              <a:spcAft>
+                <a:spcPts val="100"/>
+              </a:spcAft>
+              <a:defRPr sz="1200" b="1">
                 <a:solidFill>
                   <a:srgbClr val="202124"/>
                 </a:solidFill>
@@ -16145,167 +16548,216 @@
               </a:defRPr>
             </a:pPr>
             <a:r>
-              <a:t>주요 사용자 정의</a:t>
+              <a:t>Step 1 (08:30, P1 대시보드)</a:t>
             </a:r>
           </a:p>
           <a:p>
             <a:pPr algn="l">
+              <a:spcBef>
+                <a:spcPts val="0"/>
+              </a:spcBef>
+              <a:spcAft>
+                <a:spcPts val="400"/>
+              </a:spcAft>
+              <a:defRPr sz="1000" b="0">
+                <a:solidFill>
+                  <a:srgbClr val="333333"/>
+                </a:solidFill>
+                <a:latin typeface="Malgun Gothic"/>
+              </a:defRPr>
+            </a:pPr>
+            <a:r>
+              <a:t>출근 후 접속 → '금일 불량률 12.3% (+6.1%p)' 경고 + '배치 #B-2247~2251 연속 불량' 알림 확인</a:t>
+            </a:r>
+          </a:p>
+          <a:p>
+            <a:pPr algn="l">
+              <a:spcBef>
+                <a:spcPts val="300"/>
+              </a:spcBef>
+              <a:spcAft>
+                <a:spcPts val="100"/>
+              </a:spcAft>
+              <a:defRPr sz="1200" b="1">
+                <a:solidFill>
+                  <a:srgbClr val="202124"/>
+                </a:solidFill>
+                <a:latin typeface="Malgun Gothic"/>
+              </a:defRPr>
+            </a:pPr>
+            <a:r>
+              <a:t>Step 2 (08:35, P2 실시간 예측)</a:t>
+            </a:r>
+          </a:p>
+          <a:p>
+            <a:pPr algn="l">
+              <a:spcBef>
+                <a:spcPts val="0"/>
+              </a:spcBef>
+              <a:spcAft>
+                <a:spcPts val="400"/>
+              </a:spcAft>
+              <a:defRPr sz="1000" b="0">
+                <a:solidFill>
+                  <a:srgbClr val="333333"/>
+                </a:solidFill>
+                <a:latin typeface="Malgun Gothic"/>
+              </a:defRPr>
+            </a:pPr>
+            <a:r>
+              <a:t>진행 중 배치 #B-2252 → AI 불량 확률 78% 산출, 온도 게이지 빨간색(위험) 표시</a:t>
+            </a:r>
+          </a:p>
+          <a:p>
+            <a:pPr algn="l">
+              <a:spcBef>
+                <a:spcPts val="300"/>
+              </a:spcBef>
+              <a:spcAft>
+                <a:spcPts val="100"/>
+              </a:spcAft>
+              <a:defRPr sz="1200" b="1">
+                <a:solidFill>
+                  <a:srgbClr val="202124"/>
+                </a:solidFill>
+                <a:latin typeface="Malgun Gothic"/>
+              </a:defRPr>
+            </a:pPr>
+            <a:r>
+              <a:t>Step 3 (08:37, P3 원인 분석)</a:t>
+            </a:r>
+          </a:p>
+          <a:p>
+            <a:pPr algn="l">
+              <a:spcBef>
+                <a:spcPts val="0"/>
+              </a:spcBef>
+              <a:spcAft>
+                <a:spcPts val="400"/>
+              </a:spcAft>
+              <a:defRPr sz="1000" b="0">
+                <a:solidFill>
+                  <a:srgbClr val="333333"/>
+                </a:solidFill>
+                <a:latin typeface="Malgun Gothic"/>
+              </a:defRPr>
+            </a:pPr>
+            <a:r>
+              <a:t>SHAP Waterfall: '식각 온도(기여도 +0.34)' 1위 → Dependence Plot에서 180°C 이상 불량 급등 확인</a:t>
+            </a:r>
+          </a:p>
+          <a:p>
+            <a:pPr algn="l">
+              <a:spcBef>
+                <a:spcPts val="300"/>
+              </a:spcBef>
+              <a:spcAft>
+                <a:spcPts val="100"/>
+              </a:spcAft>
+              <a:defRPr sz="1200" b="1">
+                <a:solidFill>
+                  <a:srgbClr val="202124"/>
+                </a:solidFill>
+                <a:latin typeface="Malgun Gothic"/>
+              </a:defRPr>
+            </a:pPr>
+            <a:r>
+              <a:t>Step 4 (08:40, P4 조치 가이드)</a:t>
+            </a:r>
+          </a:p>
+          <a:p>
+            <a:pPr algn="l">
+              <a:spcBef>
+                <a:spcPts val="0"/>
+              </a:spcBef>
+              <a:spcAft>
+                <a:spcPts val="400"/>
+              </a:spcAft>
+              <a:defRPr sz="1000" b="0">
+                <a:solidFill>
+                  <a:srgbClr val="333333"/>
+                </a:solidFill>
+                <a:latin typeface="Malgun Gothic"/>
+              </a:defRPr>
+            </a:pPr>
+            <a:r>
+              <a:t>팝업: '식각 온도 → 165~175°C 하향 조정 요망' → '수용' 버튼 클릭 → 이력 자동 기록</a:t>
+            </a:r>
+          </a:p>
+          <a:p>
+            <a:pPr algn="l">
+              <a:spcBef>
+                <a:spcPts val="300"/>
+              </a:spcBef>
+              <a:spcAft>
+                <a:spcPts val="100"/>
+              </a:spcAft>
+              <a:defRPr sz="1200" b="1">
+                <a:solidFill>
+                  <a:srgbClr val="202124"/>
+                </a:solidFill>
+                <a:latin typeface="Malgun Gothic"/>
+              </a:defRPr>
+            </a:pPr>
+            <a:r>
+              <a:t>Step 5 (09:00, P1 확인)</a:t>
+            </a:r>
+          </a:p>
+          <a:p>
+            <a:pPr algn="l">
+              <a:spcBef>
+                <a:spcPts val="0"/>
+              </a:spcBef>
+              <a:spcAft>
+                <a:spcPts val="600"/>
+              </a:spcAft>
+              <a:defRPr sz="1000" b="0">
+                <a:solidFill>
+                  <a:srgbClr val="333333"/>
+                </a:solidFill>
+                <a:latin typeface="Malgun Gothic"/>
+              </a:defRPr>
+            </a:pPr>
+            <a:r>
+              <a:t>조치 후 #B-2253부터 불량률 2.1% 정상 복귀. 총 대응 시간: 약 30분 (기존 2~3일 대비 95%+ 단축)</a:t>
+            </a:r>
+          </a:p>
+          <a:p>
+            <a:pPr algn="l">
+              <a:spcBef>
+                <a:spcPts val="400"/>
+              </a:spcBef>
+              <a:spcAft>
+                <a:spcPts val="100"/>
+              </a:spcAft>
+              <a:defRPr sz="1400" b="1">
+                <a:solidFill>
+                  <a:srgbClr val="1A478A"/>
+                </a:solidFill>
+                <a:latin typeface="Malgun Gothic"/>
+              </a:defRPr>
+            </a:pPr>
+            <a:r>
+              <a:t>보조 시나리오: 주간 리포트</a:t>
+            </a:r>
+          </a:p>
+          <a:p>
+            <a:pPr algn="l">
+              <a:spcBef>
+                <a:spcPts val="0"/>
+              </a:spcBef>
               <a:spcAft>
                 <a:spcPts val="200"/>
               </a:spcAft>
               <a:defRPr sz="1000" b="0">
                 <a:solidFill>
-                  <a:srgbClr val="202124"/>
+                  <a:srgbClr val="333333"/>
                 </a:solidFill>
                 <a:latin typeface="Malgun Gothic"/>
               </a:defRPr>
             </a:pPr>
             <a:r>
-              <a:t>• 페르소나 A — 김 과장 (QC 담당자): 공정 경력 8년, 데이터 분석 경험 없음, 엑셀 수준 IT 역량. 매일 P1~P4 전체 사용</a:t>
-            </a:r>
-          </a:p>
-          <a:p>
-            <a:pPr algn="l">
-              <a:spcAft>
-                <a:spcPts val="600"/>
-              </a:spcAft>
-              <a:defRPr sz="1000" b="0">
-                <a:solidFill>
-                  <a:srgbClr val="202124"/>
-                </a:solidFill>
-                <a:latin typeface="Malgun Gothic"/>
-              </a:defRPr>
-            </a:pPr>
-            <a:r>
-              <a:t>• 페르소나 B — 박 팀장 (생산팀장): 주간 품질 리포트 검토, 의사결정권자. 주 1~2회 P1, P5 활용</a:t>
-            </a:r>
-          </a:p>
-          <a:p>
-            <a:pPr algn="l">
-              <a:spcAft>
-                <a:spcPts val="200"/>
-              </a:spcAft>
-              <a:defRPr sz="1300" b="1">
-                <a:solidFill>
-                  <a:srgbClr val="202124"/>
-                </a:solidFill>
-                <a:latin typeface="Malgun Gothic"/>
-              </a:defRPr>
-            </a:pPr>
-            <a:r>
-              <a:t>대표 시나리오: 식각 공정 온도 이상 → 불량 급증 대응</a:t>
-            </a:r>
-          </a:p>
-          <a:p>
-            <a:pPr algn="l">
-              <a:spcAft>
-                <a:spcPts val="400"/>
-              </a:spcAft>
-              <a:defRPr sz="1000" b="0">
-                <a:solidFill>
-                  <a:srgbClr val="202124"/>
-                </a:solidFill>
-                <a:latin typeface="Malgun Gothic"/>
-              </a:defRPr>
-            </a:pPr>
-            <a:r>
-              <a:t>Step 1 (08:30, P1 대시보드) — 김 과장 출근 후 QualityLens 접속. '금일 불량률 12.3% (+6.1%p)' 경고 확인. 알림 패널에서 '식각 공정 배치 #B-2247~#B-2251 연속 불량 감지' 알림 확인</a:t>
-            </a:r>
-          </a:p>
-          <a:p>
-            <a:pPr algn="l">
-              <a:spcAft>
-                <a:spcPts val="400"/>
-              </a:spcAft>
-              <a:defRPr sz="1000" b="0">
-                <a:solidFill>
-                  <a:srgbClr val="202124"/>
-                </a:solidFill>
-                <a:latin typeface="Malgun Gothic"/>
-              </a:defRPr>
-            </a:pPr>
-            <a:r>
-              <a:t>Step 2 (08:35, P2 실시간 예측) — 진행 중 배치 #B-2252 센서 게이지 실시간 확인. AI 모델 '불량 확률 78%' 산출, 온도 게이지 빨간색(위험) 표시</a:t>
-            </a:r>
-          </a:p>
-          <a:p>
-            <a:pPr algn="l">
-              <a:spcAft>
-                <a:spcPts val="400"/>
-              </a:spcAft>
-              <a:defRPr sz="1000" b="0">
-                <a:solidFill>
-                  <a:srgbClr val="202124"/>
-                </a:solidFill>
-                <a:latin typeface="Malgun Gothic"/>
-              </a:defRPr>
-            </a:pPr>
-            <a:r>
-              <a:t>Step 3 (08:37, P3 원인 분석) — SHAP Waterfall에서 '식각 온도(기여도 +0.34)' 1위 원인 지목. Dependence Plot에서 180°C 이상 구간 불량 급등 패턴 시각적 확인</a:t>
-            </a:r>
-          </a:p>
-          <a:p>
-            <a:pPr algn="l">
-              <a:spcAft>
-                <a:spcPts val="400"/>
-              </a:spcAft>
-              <a:defRPr sz="1000" b="0">
-                <a:solidFill>
-                  <a:srgbClr val="202124"/>
-                </a:solidFill>
-                <a:latin typeface="Malgun Gothic"/>
-              </a:defRPr>
-            </a:pPr>
-            <a:r>
-              <a:t>Step 4 (08:40, P4 조치 가이드) — 팝업: '식각 온도 비정상 상승 → 정상 권장 범위 165~175°C로 하향 조정 요망'. 김 과장이 '수용' 버튼 클릭 → 조치 이력 P5에 자동 기록</a:t>
-            </a:r>
-          </a:p>
-          <a:p>
-            <a:pPr algn="l">
-              <a:spcAft>
-                <a:spcPts val="600"/>
-              </a:spcAft>
-              <a:defRPr sz="1000" b="0">
-                <a:solidFill>
-                  <a:srgbClr val="202124"/>
-                </a:solidFill>
-                <a:latin typeface="Malgun Gothic"/>
-              </a:defRPr>
-            </a:pPr>
-            <a:r>
-              <a:t>Step 5 (09:00~, P1 확인) — 조치 후 #B-2253부터 불량률 2.1%로 정상 복귀 확인. 총 대응 시간: 약 30분 (기존 2~3일 → 95%+ 단축)</a:t>
-            </a:r>
-          </a:p>
-          <a:p>
-            <a:pPr algn="l">
-              <a:spcAft>
-                <a:spcPts val="200"/>
-              </a:spcAft>
-              <a:defRPr sz="1300" b="1">
-                <a:solidFill>
-                  <a:srgbClr val="202124"/>
-                </a:solidFill>
-                <a:latin typeface="Malgun Gothic"/>
-              </a:defRPr>
-            </a:pPr>
-            <a:r>
-              <a:t>보조 시나리오: 박 팀장의 주간 리포트</a:t>
-            </a:r>
-          </a:p>
-          <a:p>
-            <a:pPr algn="l">
-              <a:spcAft>
-                <a:spcPts val="200"/>
-              </a:spcAft>
-              <a:defRPr sz="1000" b="0">
-                <a:solidFill>
-                  <a:srgbClr val="202124"/>
-                </a:solidFill>
-                <a:latin typeface="Malgun Gothic"/>
-              </a:defRPr>
-            </a:pPr>
-            <a:r>
-              <a:t>매주 월요일 P5(이력 관리)에서 주간 불량률 추이, AI 감지 정확도, 반복 원인 Top 5를 확인. '식각 온도 이상이 3주 연속 주요 원인' 패턴 발견 → 설비 점검 일정 앞당기는 의사결정</a:t>
+              <a:t>박 팀장 → P5에서 주간 불량 추이, 반복 원인 Top 5 확인 → '식각 온도 3주 연속 주요 원인' → 설비 점검 앞당기기 의사결정</a:t>
             </a:r>
           </a:p>
         </p:txBody>
@@ -17158,258 +17610,325 @@
           <a:lstStyle/>
           <a:p>
             <a:pPr algn="l">
+              <a:spcBef>
+                <a:spcPts val="400"/>
+              </a:spcBef>
+              <a:spcAft>
+                <a:spcPts val="100"/>
+              </a:spcAft>
+              <a:defRPr sz="1400" b="1">
+                <a:solidFill>
+                  <a:srgbClr val="1A478A"/>
+                </a:solidFill>
+                <a:latin typeface="Malgun Gothic"/>
+              </a:defRPr>
+            </a:pPr>
+            <a:r>
+              <a:t>본선 구현 범위</a:t>
+            </a:r>
+          </a:p>
+          <a:p>
+            <a:pPr algn="l">
+              <a:spcBef>
+                <a:spcPts val="0"/>
+              </a:spcBef>
+              <a:spcAft>
+                <a:spcPts val="400"/>
+              </a:spcAft>
+              <a:defRPr sz="1000" b="0">
+                <a:solidFill>
+                  <a:srgbClr val="333333"/>
+                </a:solidFill>
+                <a:latin typeface="Malgun Gothic"/>
+              </a:defRPr>
+            </a:pPr>
+            <a:r>
+              <a:t>End-to-End 사용자 경험 완결 최소 범위. 원칙: '예측→조치까지 끊기지 않는 흐름'</a:t>
+            </a:r>
+          </a:p>
+          <a:p>
+            <a:pPr algn="l">
+              <a:spcBef>
+                <a:spcPts val="0"/>
+              </a:spcBef>
               <a:spcAft>
                 <a:spcPts val="200"/>
               </a:spcAft>
-              <a:defRPr sz="1300" b="1">
-                <a:solidFill>
-                  <a:srgbClr val="202124"/>
+              <a:defRPr sz="1000" b="0">
+                <a:solidFill>
+                  <a:srgbClr val="333333"/>
                 </a:solidFill>
                 <a:latin typeface="Malgun Gothic"/>
               </a:defRPr>
             </a:pPr>
             <a:r>
-              <a:t>본선에서 구현할 범위</a:t>
+              <a:t>• [필수] P1 대시보드: KPI 카드 + 알림 패널 + 불량률 추이 — 완전 구현</a:t>
             </a:r>
           </a:p>
           <a:p>
             <a:pPr algn="l">
-              <a:spcAft>
+              <a:spcBef>
+                <a:spcPts val="0"/>
+              </a:spcBef>
+              <a:spcAft>
+                <a:spcPts val="200"/>
+              </a:spcAft>
+              <a:defRPr sz="1000" b="0">
+                <a:solidFill>
+                  <a:srgbClr val="333333"/>
+                </a:solidFill>
+                <a:latin typeface="Malgun Gothic"/>
+              </a:defRPr>
+            </a:pPr>
+            <a:r>
+              <a:t>• [필수] P2 실시간 예측: 센서 게이지 + 배치별 확률 + 시뮬레이터 — 완전 구현</a:t>
+            </a:r>
+          </a:p>
+          <a:p>
+            <a:pPr algn="l">
+              <a:spcBef>
+                <a:spcPts val="0"/>
+              </a:spcBef>
+              <a:spcAft>
+                <a:spcPts val="200"/>
+              </a:spcAft>
+              <a:defRPr sz="1000" b="0">
+                <a:solidFill>
+                  <a:srgbClr val="333333"/>
+                </a:solidFill>
+                <a:latin typeface="Malgun Gothic"/>
+              </a:defRPr>
+            </a:pPr>
+            <a:r>
+              <a:t>• [필수] P3 원인 분석: SHAP Summary + Waterfall + Dependence Plot — 완전 구현</a:t>
+            </a:r>
+          </a:p>
+          <a:p>
+            <a:pPr algn="l">
+              <a:spcBef>
+                <a:spcPts val="0"/>
+              </a:spcBef>
+              <a:spcAft>
+                <a:spcPts val="200"/>
+              </a:spcAft>
+              <a:defRPr sz="1000" b="0">
+                <a:solidFill>
+                  <a:srgbClr val="333333"/>
+                </a:solidFill>
+                <a:latin typeface="Malgun Gothic"/>
+              </a:defRPr>
+            </a:pPr>
+            <a:r>
+              <a:t>• [핵심 데모] P4 조치 가이드: 핵심 시나리오 2~3개 + 원클릭 수용 — 시나리오 기반</a:t>
+            </a:r>
+          </a:p>
+          <a:p>
+            <a:pPr algn="l">
+              <a:spcBef>
+                <a:spcPts val="0"/>
+              </a:spcBef>
+              <a:spcAft>
+                <a:spcPts val="600"/>
+              </a:spcAft>
+              <a:defRPr sz="1000" b="0">
+                <a:solidFill>
+                  <a:srgbClr val="333333"/>
+                </a:solidFill>
+                <a:latin typeface="Malgun Gothic"/>
+              </a:defRPr>
+            </a:pPr>
+            <a:r>
+              <a:t>• [확장] P5 이력 관리: 조치 이력 테이블 — 시간 여유 시 구현</a:t>
+            </a:r>
+          </a:p>
+          <a:p>
+            <a:pPr algn="l">
+              <a:spcBef>
                 <a:spcPts val="400"/>
+              </a:spcBef>
+              <a:spcAft>
+                <a:spcPts val="100"/>
+              </a:spcAft>
+              <a:defRPr sz="1400" b="1">
+                <a:solidFill>
+                  <a:srgbClr val="1A478A"/>
+                </a:solidFill>
+                <a:latin typeface="Malgun Gothic"/>
+              </a:defRPr>
+            </a:pPr>
+            <a:r>
+              <a:t>데모 시나리오 (약 5분)</a:t>
+            </a:r>
+          </a:p>
+          <a:p>
+            <a:pPr algn="l">
+              <a:spcBef>
+                <a:spcPts val="0"/>
+              </a:spcBef>
+              <a:spcAft>
+                <a:spcPts val="200"/>
               </a:spcAft>
               <a:defRPr sz="1000" b="0">
                 <a:solidFill>
-                  <a:srgbClr val="202124"/>
+                  <a:srgbClr val="333333"/>
                 </a:solidFill>
                 <a:latin typeface="Malgun Gothic"/>
               </a:defRPr>
             </a:pPr>
             <a:r>
-              <a:t>End-to-End 사용자 경험이 완결되는 최소 범위를 MVP로 설정합니다. 핵심 원칙: '예측부터 조치까지 끊기지 않는 흐름'</a:t>
+              <a:t>정상 스트리밍 → 이상 주입 → P1 경고 → P2 불량 확률 급등 → P3 원인 지목 → P4 조치 수용 → P1 정상 복귀</a:t>
             </a:r>
           </a:p>
           <a:p>
             <a:pPr algn="l">
+              <a:spcBef>
+                <a:spcPts val="0"/>
+              </a:spcBef>
+              <a:spcAft>
+                <a:spcPts val="400"/>
+              </a:spcAft>
+              <a:defRPr sz="1000" b="0">
+                <a:solidFill>
+                  <a:srgbClr val="333333"/>
+                </a:solidFill>
+                <a:latin typeface="Malgun Gothic"/>
+              </a:defRPr>
+            </a:pPr>
+            <a:r>
+              <a:t>→ Predict → Explain → Act 전체 루프를 한 번의 시연으로 완결</a:t>
+            </a:r>
+          </a:p>
+          <a:p>
+            <a:pPr algn="l">
+              <a:spcBef>
+                <a:spcPts val="0"/>
+              </a:spcBef>
+              <a:spcAft>
+                <a:spcPts val="600"/>
+              </a:spcAft>
+              <a:defRPr sz="1000" b="1">
+                <a:solidFill>
+                  <a:srgbClr val="C62828"/>
+                </a:solidFill>
+                <a:latin typeface="Malgun Gothic"/>
+              </a:defRPr>
+            </a:pPr>
+            <a:r>
+              <a:t>※ Fail-Safe: 인프라 장애 대비, MVP 정상 구동 시연 영상 사전 준비</a:t>
+            </a:r>
+          </a:p>
+          <a:p>
+            <a:pPr algn="l">
+              <a:spcBef>
+                <a:spcPts val="400"/>
+              </a:spcBef>
+              <a:spcAft>
+                <a:spcPts val="100"/>
+              </a:spcAft>
+              <a:defRPr sz="1400" b="1">
+                <a:solidFill>
+                  <a:srgbClr val="1A478A"/>
+                </a:solidFill>
+                <a:latin typeface="Malgun Gothic"/>
+              </a:defRPr>
+            </a:pPr>
+            <a:r>
+              <a:t>사전 개발 전략 (예선 통과 후 ~ 본선 전 9일)</a:t>
+            </a:r>
+          </a:p>
+          <a:p>
+            <a:pPr algn="l">
+              <a:spcBef>
+                <a:spcPts val="0"/>
+              </a:spcBef>
               <a:spcAft>
                 <a:spcPts val="200"/>
               </a:spcAft>
               <a:defRPr sz="1000" b="0">
                 <a:solidFill>
-                  <a:srgbClr val="202124"/>
+                  <a:srgbClr val="333333"/>
                 </a:solidFill>
                 <a:latin typeface="Malgun Gothic"/>
               </a:defRPr>
             </a:pPr>
             <a:r>
-              <a:t>• [필수] P1 종합 대시보드: KPI 카드 + 알림 패널 + 불량률 추이 차트 — 완전 구현</a:t>
+              <a:t>• ~5/18: 데이터 전처리 파이프라인 + XGBoost 학습·저장</a:t>
             </a:r>
           </a:p>
           <a:p>
             <a:pPr algn="l">
+              <a:spcBef>
+                <a:spcPts val="0"/>
+              </a:spcBef>
               <a:spcAft>
                 <a:spcPts val="200"/>
               </a:spcAft>
               <a:defRPr sz="1000" b="0">
                 <a:solidFill>
-                  <a:srgbClr val="202124"/>
+                  <a:srgbClr val="333333"/>
                 </a:solidFill>
                 <a:latin typeface="Malgun Gothic"/>
               </a:defRPr>
             </a:pPr>
             <a:r>
-              <a:t>• [필수] P2 실시간 예측: 센서 게이지 + 배치별 불량 확률 + 시뮬레이터 스트리밍 — 완전 구현</a:t>
+              <a:t>• ~5/19: SHAP Explainer 사전 계산·캐싱</a:t>
             </a:r>
           </a:p>
           <a:p>
             <a:pPr algn="l">
+              <a:spcBef>
+                <a:spcPts val="0"/>
+              </a:spcBef>
               <a:spcAft>
                 <a:spcPts val="200"/>
               </a:spcAft>
               <a:defRPr sz="1000" b="0">
                 <a:solidFill>
-                  <a:srgbClr val="202124"/>
+                  <a:srgbClr val="333333"/>
                 </a:solidFill>
                 <a:latin typeface="Malgun Gothic"/>
               </a:defRPr>
             </a:pPr>
             <a:r>
-              <a:t>• [필수] P3 원인 분석: SHAP Summary + Waterfall + Dependence Plot — 완전 구현</a:t>
+              <a:t>• ~5/20: Streamlit 페이지 골격 (레이아웃 + 네비게이션)</a:t>
             </a:r>
           </a:p>
           <a:p>
             <a:pPr algn="l">
+              <a:spcBef>
+                <a:spcPts val="0"/>
+              </a:spcBef>
               <a:spcAft>
                 <a:spcPts val="200"/>
               </a:spcAft>
               <a:defRPr sz="1000" b="0">
                 <a:solidFill>
-                  <a:srgbClr val="202124"/>
+                  <a:srgbClr val="333333"/>
                 </a:solidFill>
                 <a:latin typeface="Malgun Gothic"/>
               </a:defRPr>
             </a:pPr>
             <a:r>
-              <a:t>• [핵심 데모] P4 조치 가이드: 핵심 불량 시나리오 2~3개 + 원클릭 수용 버튼 — 시나리오 기반 구현</a:t>
+              <a:t>• ~5/21: 시뮬레이터 데이터 세트 준비</a:t>
             </a:r>
           </a:p>
           <a:p>
             <a:pPr algn="l">
-              <a:spcAft>
-                <a:spcPts val="600"/>
+              <a:spcBef>
+                <a:spcPts val="0"/>
+              </a:spcBef>
+              <a:spcAft>
+                <a:spcPts val="200"/>
               </a:spcAft>
               <a:defRPr sz="1000" b="0">
                 <a:solidFill>
-                  <a:srgbClr val="202124"/>
+                  <a:srgbClr val="333333"/>
                 </a:solidFill>
                 <a:latin typeface="Malgun Gothic"/>
               </a:defRPr>
             </a:pPr>
             <a:r>
-              <a:t>• [확장] P5 이력 관리: 조치 이력 테이블 — 시간 여유 시 구현</a:t>
-            </a:r>
-          </a:p>
-          <a:p>
-            <a:pPr algn="l">
-              <a:spcAft>
-                <a:spcPts val="200"/>
-              </a:spcAft>
-              <a:defRPr sz="1300" b="1">
-                <a:solidFill>
-                  <a:srgbClr val="202124"/>
-                </a:solidFill>
-                <a:latin typeface="Malgun Gothic"/>
-              </a:defRPr>
-            </a:pPr>
-            <a:r>
-              <a:t>데모 시나리오 (약 5분)</a:t>
-            </a:r>
-          </a:p>
-          <a:p>
-            <a:pPr algn="l">
-              <a:spcAft>
-                <a:spcPts val="400"/>
-              </a:spcAft>
-              <a:defRPr sz="1000" b="0">
-                <a:solidFill>
-                  <a:srgbClr val="202124"/>
-                </a:solidFill>
-                <a:latin typeface="Malgun Gothic"/>
-              </a:defRPr>
-            </a:pPr>
-            <a:r>
-              <a:t>시뮬레이터 정상 스트리밍 → 이상 데이터 주입 → P1 경고 → P2 불량 확률 급등 → P3 SHAP 원인 지목 → P4 조치 가이드 확인 후 원클릭 수용 → P1 불량률 정상 복귀 확인. Predict → Explain → Act 전체 루프를 한 번의 시연으로 완결.</a:t>
-            </a:r>
-          </a:p>
-          <a:p>
-            <a:pPr algn="l">
-              <a:spcAft>
-                <a:spcPts val="600"/>
-              </a:spcAft>
-              <a:defRPr sz="1000" b="1">
-                <a:solidFill>
-                  <a:srgbClr val="C62828"/>
-                </a:solidFill>
-                <a:latin typeface="Malgun Gothic"/>
-              </a:defRPr>
-            </a:pPr>
-            <a:r>
-              <a:t>※ Fail-Safe: 네트워크 불안정 등 인프라 장애 대비, 사전 개발된 MVP 정상 구동 시연 영상을 별도 준비하여 평가 안정성 확보</a:t>
-            </a:r>
-          </a:p>
-          <a:p>
-            <a:pPr algn="l">
-              <a:spcAft>
-                <a:spcPts val="200"/>
-              </a:spcAft>
-              <a:defRPr sz="1300" b="1">
-                <a:solidFill>
-                  <a:srgbClr val="202124"/>
-                </a:solidFill>
-                <a:latin typeface="Malgun Gothic"/>
-              </a:defRPr>
-            </a:pPr>
-            <a:r>
-              <a:t>사전 개발 전략 (예선 통과 후 ~ 본선 전 9일간)</a:t>
-            </a:r>
-          </a:p>
-          <a:p>
-            <a:pPr algn="l">
-              <a:spcAft>
-                <a:spcPts val="200"/>
-              </a:spcAft>
-              <a:defRPr sz="1000" b="0">
-                <a:solidFill>
-                  <a:srgbClr val="202124"/>
-                </a:solidFill>
-                <a:latin typeface="Malgun Gothic"/>
-              </a:defRPr>
-            </a:pPr>
-            <a:r>
-              <a:t>• ~5/18: 데이터 전처리 파이프라인 + XGBoost 모델 학습·저장 완료</a:t>
-            </a:r>
-          </a:p>
-          <a:p>
-            <a:pPr algn="l">
-              <a:spcAft>
-                <a:spcPts val="200"/>
-              </a:spcAft>
-              <a:defRPr sz="1000" b="0">
-                <a:solidFill>
-                  <a:srgbClr val="202124"/>
-                </a:solidFill>
-                <a:latin typeface="Malgun Gothic"/>
-              </a:defRPr>
-            </a:pPr>
-            <a:r>
-              <a:t>• ~5/19: SHAP Explainer 사전 계산·캐싱 완료</a:t>
-            </a:r>
-          </a:p>
-          <a:p>
-            <a:pPr algn="l">
-              <a:spcAft>
-                <a:spcPts val="200"/>
-              </a:spcAft>
-              <a:defRPr sz="1000" b="0">
-                <a:solidFill>
-                  <a:srgbClr val="202124"/>
-                </a:solidFill>
-                <a:latin typeface="Malgun Gothic"/>
-              </a:defRPr>
-            </a:pPr>
-            <a:r>
-              <a:t>• ~5/20: Streamlit 페이지 골격(레이아웃+네비게이션) 완성</a:t>
-            </a:r>
-          </a:p>
-          <a:p>
-            <a:pPr algn="l">
-              <a:spcAft>
-                <a:spcPts val="200"/>
-              </a:spcAft>
-              <a:defRPr sz="1000" b="0">
-                <a:solidFill>
-                  <a:srgbClr val="202124"/>
-                </a:solidFill>
-                <a:latin typeface="Malgun Gothic"/>
-              </a:defRPr>
-            </a:pPr>
-            <a:r>
-              <a:t>• ~5/21: 시뮬레이터(정상/이상 시나리오) 데이터 세트 준비</a:t>
-            </a:r>
-          </a:p>
-          <a:p>
-            <a:pPr algn="l">
-              <a:spcAft>
-                <a:spcPts val="200"/>
-              </a:spcAft>
-              <a:defRPr sz="1000" b="1">
-                <a:solidFill>
-                  <a:srgbClr val="202124"/>
-                </a:solidFill>
-                <a:latin typeface="Malgun Gothic"/>
-              </a:defRPr>
-            </a:pPr>
-            <a:r>
-              <a:t>→ 본선 당일에는 '조립 + 연결 + 시각적 완성도 높이기'에 집중</a:t>
+              <a:t>→ 본선 당일: '조립 + 연결 + 시각적 완성도'에 집중</a:t>
             </a:r>
           </a:p>
         </p:txBody>
@@ -18287,12 +18806,15 @@
           <a:lstStyle/>
           <a:p>
             <a:pPr algn="l">
-              <a:spcAft>
-                <a:spcPts val="200"/>
-              </a:spcAft>
-              <a:defRPr sz="1300" b="1">
-                <a:solidFill>
-                  <a:srgbClr val="202124"/>
+              <a:spcBef>
+                <a:spcPts val="400"/>
+              </a:spcBef>
+              <a:spcAft>
+                <a:spcPts val="100"/>
+              </a:spcAft>
+              <a:defRPr sz="1400" b="1">
+                <a:solidFill>
+                  <a:srgbClr val="1A478A"/>
                 </a:solidFill>
                 <a:latin typeface="Malgun Gothic"/>
               </a:defRPr>
@@ -18308,226 +18830,268 @@
           </a:p>
           <a:p>
             <a:pPr algn="l">
+              <a:spcBef>
+                <a:spcPts val="0"/>
+              </a:spcBef>
               <a:spcAft>
                 <a:spcPts val="200"/>
               </a:spcAft>
               <a:defRPr sz="1000" b="0">
                 <a:solidFill>
-                  <a:srgbClr val="202124"/>
+                  <a:srgbClr val="333333"/>
                 </a:solidFill>
                 <a:latin typeface="Malgun Gothic"/>
               </a:defRPr>
             </a:pPr>
             <a:r>
-              <a:t>• 불량 감지 시점: 최종 검사(사후) → 공정 중간(사전 예측) — 70%+ 사전 감지</a:t>
+              <a:t>• 불량 감지: 최종 검사(사후) → 공정 중간(사전) — 70%+ 사전 감지</a:t>
             </a:r>
           </a:p>
           <a:p>
             <a:pPr algn="l">
+              <a:spcBef>
+                <a:spcPts val="0"/>
+              </a:spcBef>
               <a:spcAft>
                 <a:spcPts val="200"/>
               </a:spcAft>
               <a:defRPr sz="1000" b="0">
                 <a:solidFill>
-                  <a:srgbClr val="202124"/>
+                  <a:srgbClr val="333333"/>
                 </a:solidFill>
                 <a:latin typeface="Malgun Gothic"/>
               </a:defRPr>
             </a:pPr>
             <a:r>
-              <a:t>• 불량 원인 분석 시간: 평균 2~3일(수기) → 실시간 자동 분석 — 99% 단축</a:t>
+              <a:t>• 원인 분석: 2~3일(수기) → 실시간 자동 — 99% 단축</a:t>
             </a:r>
           </a:p>
           <a:p>
             <a:pPr algn="l">
+              <a:spcBef>
+                <a:spcPts val="0"/>
+              </a:spcBef>
               <a:spcAft>
                 <a:spcPts val="200"/>
               </a:spcAft>
               <a:defRPr sz="1000" b="0">
                 <a:solidFill>
-                  <a:srgbClr val="202124"/>
+                  <a:srgbClr val="333333"/>
                 </a:solidFill>
                 <a:latin typeface="Malgun Gothic"/>
               </a:defRPr>
             </a:pPr>
             <a:r>
-              <a:t>• 불량 대응 총 소요 시간: 수일 → 30분 이내 — 95%+ 단축</a:t>
+              <a:t>• 대응 시간: 수일 → 30분 이내 — 95%+ 단축</a:t>
             </a:r>
           </a:p>
           <a:p>
             <a:pPr algn="l">
+              <a:spcBef>
+                <a:spcPts val="0"/>
+              </a:spcBef>
               <a:spcAft>
                 <a:spcPts val="600"/>
               </a:spcAft>
               <a:defRPr sz="1000" b="0">
                 <a:solidFill>
-                  <a:srgbClr val="202124"/>
+                  <a:srgbClr val="333333"/>
                 </a:solidFill>
                 <a:latin typeface="Malgun Gothic"/>
               </a:defRPr>
             </a:pPr>
             <a:r>
-              <a:t>• 연간 불량 관련 손실 비용: 20% 이상 절감 (중소기업 기준 수천만 원)</a:t>
+              <a:t>• 손실 비용: 연간 20%+ 절감 (중소기업 기준 수천만 원)</a:t>
             </a:r>
           </a:p>
           <a:p>
             <a:pPr algn="l">
+              <a:spcBef>
+                <a:spcPts val="400"/>
+              </a:spcBef>
+              <a:spcAft>
+                <a:spcPts val="100"/>
+              </a:spcAft>
+              <a:defRPr sz="1400" b="1">
+                <a:solidFill>
+                  <a:srgbClr val="1A478A"/>
+                </a:solidFill>
+                <a:latin typeface="Malgun Gothic"/>
+              </a:defRPr>
+            </a:pPr>
+            <a:r>
+              <a:t>정성적 기대 효과</a:t>
+            </a:r>
+          </a:p>
+          <a:p>
+            <a:pPr algn="l">
+              <a:spcBef>
+                <a:spcPts val="0"/>
+              </a:spcBef>
               <a:spcAft>
                 <a:spcPts val="200"/>
               </a:spcAft>
-              <a:defRPr sz="1300" b="1">
-                <a:solidFill>
-                  <a:srgbClr val="202124"/>
+              <a:defRPr sz="1000" b="0">
+                <a:solidFill>
+                  <a:srgbClr val="333333"/>
                 </a:solidFill>
                 <a:latin typeface="Malgun Gothic"/>
               </a:defRPr>
             </a:pPr>
             <a:r>
-              <a:t>정성적 기대 효과</a:t>
+              <a:t>• 데이터 기반 품질 문화 정착: 경험·직감 → AI 근거 기반 의사결정 전환</a:t>
             </a:r>
           </a:p>
           <a:p>
             <a:pPr algn="l">
+              <a:spcBef>
+                <a:spcPts val="0"/>
+              </a:spcBef>
               <a:spcAft>
                 <a:spcPts val="200"/>
               </a:spcAft>
               <a:defRPr sz="1000" b="0">
                 <a:solidFill>
-                  <a:srgbClr val="202124"/>
+                  <a:srgbClr val="333333"/>
                 </a:solidFill>
                 <a:latin typeface="Malgun Gothic"/>
               </a:defRPr>
             </a:pPr>
             <a:r>
-              <a:t>• 데이터 기반 품질 문화 정착: 경험·직감 의존 → AI 근거 기반 의사결정 전환. 조치 이력 자동 축적으로 조직 지식 체계화</a:t>
+              <a:t>• 현장 역량 강화: AI가 대체가 아닌 보강(Augmentation), SHAP으로 공정 학습</a:t>
             </a:r>
           </a:p>
           <a:p>
             <a:pPr algn="l">
+              <a:spcBef>
+                <a:spcPts val="0"/>
+              </a:spcBef>
+              <a:spcAft>
+                <a:spcPts val="600"/>
+              </a:spcAft>
+              <a:defRPr sz="1000" b="0">
+                <a:solidFill>
+                  <a:srgbClr val="333333"/>
+                </a:solidFill>
+                <a:latin typeface="Malgun Gothic"/>
+              </a:defRPr>
+            </a:pPr>
+            <a:r>
+              <a:t>• 중소기업 진입 장벽 해소: 데이터팀 없이 Python 오픈소스로 즉시 도입 가능</a:t>
+            </a:r>
+          </a:p>
+          <a:p>
+            <a:pPr algn="l">
+              <a:spcBef>
+                <a:spcPts val="400"/>
+              </a:spcBef>
+              <a:spcAft>
+                <a:spcPts val="100"/>
+              </a:spcAft>
+              <a:defRPr sz="1400" b="1">
+                <a:solidFill>
+                  <a:srgbClr val="1A478A"/>
+                </a:solidFill>
+                <a:latin typeface="Malgun Gothic"/>
+              </a:defRPr>
+            </a:pPr>
+            <a:r>
+              <a:t>현장 적용 가능성</a:t>
+            </a:r>
+          </a:p>
+          <a:p>
+            <a:pPr algn="l">
+              <a:spcBef>
+                <a:spcPts val="0"/>
+              </a:spcBef>
+              <a:spcAft>
+                <a:spcPts val="600"/>
+              </a:spcAft>
+              <a:defRPr sz="1000" b="0">
+                <a:solidFill>
+                  <a:srgbClr val="333333"/>
+                </a:solidFill>
+                <a:latin typeface="Malgun Gothic"/>
+              </a:defRPr>
+            </a:pPr>
+            <a:r>
+              <a:t>MVP → 현장 전환 비용이 낮음. 데이터 소스만 교체(오픈 데이터 → MES/센서 API)하면 AI 파이프라인·UI 그대로 유지</a:t>
+            </a:r>
+          </a:p>
+          <a:p>
+            <a:pPr algn="l">
+              <a:spcBef>
+                <a:spcPts val="400"/>
+              </a:spcBef>
+              <a:spcAft>
+                <a:spcPts val="100"/>
+              </a:spcAft>
+              <a:defRPr sz="1400" b="1">
+                <a:solidFill>
+                  <a:srgbClr val="1A478A"/>
+                </a:solidFill>
+                <a:latin typeface="Malgun Gothic"/>
+              </a:defRPr>
+            </a:pPr>
+            <a:r>
+              <a:t>향후 고도화 로드맵</a:t>
+            </a:r>
+          </a:p>
+          <a:p>
+            <a:pPr algn="l">
+              <a:spcBef>
+                <a:spcPts val="0"/>
+              </a:spcBef>
               <a:spcAft>
                 <a:spcPts val="200"/>
               </a:spcAft>
               <a:defRPr sz="1000" b="0">
                 <a:solidFill>
-                  <a:srgbClr val="202124"/>
+                  <a:srgbClr val="333333"/>
                 </a:solidFill>
                 <a:latin typeface="Malgun Gothic"/>
               </a:defRPr>
             </a:pPr>
             <a:r>
-              <a:t>• 현장 작업자 역량 강화: AI가 작업자를 대체하는 것이 아니라 보강(Augmentation). SHAP 시각화를 통해 공정 변수 간 관계를 자연스럽게 학습</a:t>
+              <a:t>• Phase 1 (1~3개월): 다중 공정 지원 + 자동 재학습(Auto-Retrain)</a:t>
             </a:r>
           </a:p>
           <a:p>
             <a:pPr algn="l">
-              <a:spcAft>
-                <a:spcPts val="600"/>
+              <a:spcBef>
+                <a:spcPts val="0"/>
+              </a:spcBef>
+              <a:spcAft>
+                <a:spcPts val="200"/>
               </a:spcAft>
               <a:defRPr sz="1000" b="0">
                 <a:solidFill>
-                  <a:srgbClr val="202124"/>
+                  <a:srgbClr val="333333"/>
                 </a:solidFill>
                 <a:latin typeface="Malgun Gothic"/>
               </a:defRPr>
             </a:pPr>
             <a:r>
-              <a:t>• 중소기업 스마트 팩토리 진입 장벽 해소: 별도 데이터팀 없이 Python 기반 오픈소스 스택으로 즉시 도입 가능. 경기도 스마트공장 보급 확산 사업 취지와 정확히 부합</a:t>
+              <a:t>• Phase 2 (3~6개월): 설비 고장 예지 모듈 → 품질+설비 통합 관리</a:t>
             </a:r>
           </a:p>
           <a:p>
             <a:pPr algn="l">
+              <a:spcBef>
+                <a:spcPts val="0"/>
+              </a:spcBef>
               <a:spcAft>
                 <a:spcPts val="200"/>
               </a:spcAft>
-              <a:defRPr sz="1300" b="1">
-                <a:solidFill>
-                  <a:srgbClr val="202124"/>
+              <a:defRPr sz="1000" b="0">
+                <a:solidFill>
+                  <a:srgbClr val="333333"/>
                 </a:solidFill>
                 <a:latin typeface="Malgun Gothic"/>
               </a:defRPr>
             </a:pPr>
             <a:r>
-              <a:t>현장 적용 가능성</a:t>
-            </a:r>
-          </a:p>
-          <a:p>
-            <a:pPr algn="l">
-              <a:spcAft>
-                <a:spcPts val="600"/>
-              </a:spcAft>
-              <a:defRPr sz="1000" b="0">
-                <a:solidFill>
-                  <a:srgbClr val="202124"/>
-                </a:solidFill>
-                <a:latin typeface="Malgun Gothic"/>
-              </a:defRPr>
-            </a:pPr>
-            <a:r>
-              <a:t>MVP에서 현장 도입으로의 전환 비용이 낮습니다. Streamlit이 Python 생태계 위에서 동작하므로 데이터 소스만 교체(오픈 데이터셋 → MES/센서 API)하면 AI 파이프라인과 UI가 그대로 유지됩니다.</a:t>
-            </a:r>
-          </a:p>
-          <a:p>
-            <a:pPr algn="l">
-              <a:spcAft>
-                <a:spcPts val="200"/>
-              </a:spcAft>
-              <a:defRPr sz="1300" b="1">
-                <a:solidFill>
-                  <a:srgbClr val="202124"/>
-                </a:solidFill>
-                <a:latin typeface="Malgun Gothic"/>
-              </a:defRPr>
-            </a:pPr>
-            <a:r>
-              <a:t>향후 고도화 로드맵</a:t>
-            </a:r>
-          </a:p>
-          <a:p>
-            <a:pPr algn="l">
-              <a:spcAft>
-                <a:spcPts val="200"/>
-              </a:spcAft>
-              <a:defRPr sz="1000" b="0">
-                <a:solidFill>
-                  <a:srgbClr val="202124"/>
-                </a:solidFill>
-                <a:latin typeface="Malgun Gothic"/>
-              </a:defRPr>
-            </a:pPr>
-            <a:r>
-              <a:t>• Phase 1 (도입 후 1~3개월): 다중 공정 지원 + 자동 재학습(Auto-Retrain)</a:t>
-            </a:r>
-          </a:p>
-          <a:p>
-            <a:pPr algn="l">
-              <a:spcAft>
-                <a:spcPts val="200"/>
-              </a:spcAft>
-              <a:defRPr sz="1000" b="0">
-                <a:solidFill>
-                  <a:srgbClr val="202124"/>
-                </a:solidFill>
-                <a:latin typeface="Malgun Gothic"/>
-              </a:defRPr>
-            </a:pPr>
-            <a:r>
-              <a:t>• Phase 2 (3~6개월): 설비 고장 예지 모듈 추가 → 품질+설비 통합 관리</a:t>
-            </a:r>
-          </a:p>
-          <a:p>
-            <a:pPr algn="l">
-              <a:spcAft>
-                <a:spcPts val="200"/>
-              </a:spcAft>
-              <a:defRPr sz="1000" b="0">
-                <a:solidFill>
-                  <a:srgbClr val="202124"/>
-                </a:solidFill>
-                <a:latin typeface="Malgun Gothic"/>
-              </a:defRPr>
-            </a:pPr>
-            <a:r>
-              <a:t>• Phase 3 (6~12개월): 생산 계획 최적화 + 안전 관리 → 중소기업형 통합 스마트 공장 플랫폼으로 확장</a:t>
+              <a:t>• Phase 3 (6~12개월): 생산 계획 최적화 + 안전 관리 → 중소기업형 통합 스마트 공장 플랫폼</a:t>
             </a:r>
           </a:p>
         </p:txBody>
